--- a/MSRIT_TWT_Submission.pptx
+++ b/MSRIT_TWT_Submission.pptx
@@ -9,13 +9,14 @@
     <p:sldId id="280" r:id="rId3"/>
     <p:sldId id="281" r:id="rId4"/>
     <p:sldId id="282" r:id="rId5"/>
-    <p:sldId id="283" r:id="rId6"/>
-    <p:sldId id="284" r:id="rId7"/>
-    <p:sldId id="285" r:id="rId8"/>
-    <p:sldId id="286" r:id="rId9"/>
-    <p:sldId id="287" r:id="rId10"/>
-    <p:sldId id="288" r:id="rId11"/>
-    <p:sldId id="289" r:id="rId12"/>
+    <p:sldId id="290" r:id="rId6"/>
+    <p:sldId id="283" r:id="rId7"/>
+    <p:sldId id="284" r:id="rId8"/>
+    <p:sldId id="285" r:id="rId9"/>
+    <p:sldId id="286" r:id="rId10"/>
+    <p:sldId id="287" r:id="rId11"/>
+    <p:sldId id="288" r:id="rId12"/>
+    <p:sldId id="289" r:id="rId13"/>
   </p:sldIdLst>
   <p:sldSz cx="12192000" cy="6858000"/>
   <p:notesSz cx="6858000" cy="9144000"/>
@@ -114,6 +115,11 @@
       </a:defRPr>
     </a:lvl9pPr>
   </p:defaultTextStyle>
+  <p:extLst>
+    <p:ext uri="{EFAFB233-063F-42B5-8137-9DF3F51BA10A}">
+      <p15:sldGuideLst xmlns:p15="http://schemas.microsoft.com/office/powerpoint/2012/main"/>
+    </p:ext>
+  </p:extLst>
 </p:presentation>
 </file>
 
@@ -139,7 +145,7 @@
           <p:cNvPr id="2" name="Title 1">
             <a:extLst>
               <a:ext uri="{FF2B5EF4-FFF2-40B4-BE49-F238E27FC236}">
-                <a16:creationId xmlns:a16="http://schemas.microsoft.com/office/drawing/2014/main" id="{37D3A9DF-1D1A-C154-A4E7-C323E78B7891}"/>
+                <a16:creationId xmlns:a16="http://schemas.microsoft.com/office/drawing/2014/main" xmlns="" id="{37D3A9DF-1D1A-C154-A4E7-C323E78B7891}"/>
               </a:ext>
             </a:extLst>
           </p:cNvPr>
@@ -177,7 +183,7 @@
           <p:cNvPr id="3" name="Subtitle 2">
             <a:extLst>
               <a:ext uri="{FF2B5EF4-FFF2-40B4-BE49-F238E27FC236}">
-                <a16:creationId xmlns:a16="http://schemas.microsoft.com/office/drawing/2014/main" id="{62076109-83D5-4418-0BDB-80331C2AACD6}"/>
+                <a16:creationId xmlns:a16="http://schemas.microsoft.com/office/drawing/2014/main" xmlns="" id="{62076109-83D5-4418-0BDB-80331C2AACD6}"/>
               </a:ext>
             </a:extLst>
           </p:cNvPr>
@@ -248,7 +254,7 @@
           <p:cNvPr id="4" name="Date Placeholder 3">
             <a:extLst>
               <a:ext uri="{FF2B5EF4-FFF2-40B4-BE49-F238E27FC236}">
-                <a16:creationId xmlns:a16="http://schemas.microsoft.com/office/drawing/2014/main" id="{B74139E8-E5CF-981A-83E8-CB124EB6420F}"/>
+                <a16:creationId xmlns:a16="http://schemas.microsoft.com/office/drawing/2014/main" xmlns="" id="{B74139E8-E5CF-981A-83E8-CB124EB6420F}"/>
               </a:ext>
             </a:extLst>
           </p:cNvPr>
@@ -277,7 +283,7 @@
           <p:cNvPr id="5" name="Footer Placeholder 4">
             <a:extLst>
               <a:ext uri="{FF2B5EF4-FFF2-40B4-BE49-F238E27FC236}">
-                <a16:creationId xmlns:a16="http://schemas.microsoft.com/office/drawing/2014/main" id="{FE54C216-DE62-FF37-F87E-5BB102C97C9D}"/>
+                <a16:creationId xmlns:a16="http://schemas.microsoft.com/office/drawing/2014/main" xmlns="" id="{FE54C216-DE62-FF37-F87E-5BB102C97C9D}"/>
               </a:ext>
             </a:extLst>
           </p:cNvPr>
@@ -302,7 +308,7 @@
           <p:cNvPr id="6" name="Slide Number Placeholder 5">
             <a:extLst>
               <a:ext uri="{FF2B5EF4-FFF2-40B4-BE49-F238E27FC236}">
-                <a16:creationId xmlns:a16="http://schemas.microsoft.com/office/drawing/2014/main" id="{A057678A-95FD-6E6B-4C6C-4FF4FDC68DC5}"/>
+                <a16:creationId xmlns:a16="http://schemas.microsoft.com/office/drawing/2014/main" xmlns="" id="{A057678A-95FD-6E6B-4C6C-4FF4FDC68DC5}"/>
               </a:ext>
             </a:extLst>
           </p:cNvPr>
@@ -361,7 +367,7 @@
           <p:cNvPr id="2" name="Title 1">
             <a:extLst>
               <a:ext uri="{FF2B5EF4-FFF2-40B4-BE49-F238E27FC236}">
-                <a16:creationId xmlns:a16="http://schemas.microsoft.com/office/drawing/2014/main" id="{B280994D-B9D5-422B-EAD0-53B1E6139389}"/>
+                <a16:creationId xmlns:a16="http://schemas.microsoft.com/office/drawing/2014/main" xmlns="" id="{B280994D-B9D5-422B-EAD0-53B1E6139389}"/>
               </a:ext>
             </a:extLst>
           </p:cNvPr>
@@ -390,7 +396,7 @@
           <p:cNvPr id="3" name="Vertical Text Placeholder 2">
             <a:extLst>
               <a:ext uri="{FF2B5EF4-FFF2-40B4-BE49-F238E27FC236}">
-                <a16:creationId xmlns:a16="http://schemas.microsoft.com/office/drawing/2014/main" id="{FFAD68E6-E5CA-7F68-70D4-8AC381578A40}"/>
+                <a16:creationId xmlns:a16="http://schemas.microsoft.com/office/drawing/2014/main" xmlns="" id="{FFAD68E6-E5CA-7F68-70D4-8AC381578A40}"/>
               </a:ext>
             </a:extLst>
           </p:cNvPr>
@@ -448,7 +454,7 @@
           <p:cNvPr id="4" name="Date Placeholder 3">
             <a:extLst>
               <a:ext uri="{FF2B5EF4-FFF2-40B4-BE49-F238E27FC236}">
-                <a16:creationId xmlns:a16="http://schemas.microsoft.com/office/drawing/2014/main" id="{D539EF81-0BA3-97AE-DCB1-1A5BE3AE491C}"/>
+                <a16:creationId xmlns:a16="http://schemas.microsoft.com/office/drawing/2014/main" xmlns="" id="{D539EF81-0BA3-97AE-DCB1-1A5BE3AE491C}"/>
               </a:ext>
             </a:extLst>
           </p:cNvPr>
@@ -477,7 +483,7 @@
           <p:cNvPr id="5" name="Footer Placeholder 4">
             <a:extLst>
               <a:ext uri="{FF2B5EF4-FFF2-40B4-BE49-F238E27FC236}">
-                <a16:creationId xmlns:a16="http://schemas.microsoft.com/office/drawing/2014/main" id="{9B91095F-C34A-5541-B85F-BAB0544FD155}"/>
+                <a16:creationId xmlns:a16="http://schemas.microsoft.com/office/drawing/2014/main" xmlns="" id="{9B91095F-C34A-5541-B85F-BAB0544FD155}"/>
               </a:ext>
             </a:extLst>
           </p:cNvPr>
@@ -502,7 +508,7 @@
           <p:cNvPr id="6" name="Slide Number Placeholder 5">
             <a:extLst>
               <a:ext uri="{FF2B5EF4-FFF2-40B4-BE49-F238E27FC236}">
-                <a16:creationId xmlns:a16="http://schemas.microsoft.com/office/drawing/2014/main" id="{AD361146-6560-5081-A5DF-F909B56404F9}"/>
+                <a16:creationId xmlns:a16="http://schemas.microsoft.com/office/drawing/2014/main" xmlns="" id="{AD361146-6560-5081-A5DF-F909B56404F9}"/>
               </a:ext>
             </a:extLst>
           </p:cNvPr>
@@ -561,7 +567,7 @@
           <p:cNvPr id="2" name="Vertical Title 1">
             <a:extLst>
               <a:ext uri="{FF2B5EF4-FFF2-40B4-BE49-F238E27FC236}">
-                <a16:creationId xmlns:a16="http://schemas.microsoft.com/office/drawing/2014/main" id="{835326F9-79AD-A794-7754-C41069A1C4CA}"/>
+                <a16:creationId xmlns:a16="http://schemas.microsoft.com/office/drawing/2014/main" xmlns="" id="{835326F9-79AD-A794-7754-C41069A1C4CA}"/>
               </a:ext>
             </a:extLst>
           </p:cNvPr>
@@ -595,7 +601,7 @@
           <p:cNvPr id="3" name="Vertical Text Placeholder 2">
             <a:extLst>
               <a:ext uri="{FF2B5EF4-FFF2-40B4-BE49-F238E27FC236}">
-                <a16:creationId xmlns:a16="http://schemas.microsoft.com/office/drawing/2014/main" id="{7792DA10-4977-FC9C-FAE2-A004847A88F6}"/>
+                <a16:creationId xmlns:a16="http://schemas.microsoft.com/office/drawing/2014/main" xmlns="" id="{7792DA10-4977-FC9C-FAE2-A004847A88F6}"/>
               </a:ext>
             </a:extLst>
           </p:cNvPr>
@@ -658,7 +664,7 @@
           <p:cNvPr id="4" name="Date Placeholder 3">
             <a:extLst>
               <a:ext uri="{FF2B5EF4-FFF2-40B4-BE49-F238E27FC236}">
-                <a16:creationId xmlns:a16="http://schemas.microsoft.com/office/drawing/2014/main" id="{0DE19733-B409-E693-F11B-C65CC7D118B5}"/>
+                <a16:creationId xmlns:a16="http://schemas.microsoft.com/office/drawing/2014/main" xmlns="" id="{0DE19733-B409-E693-F11B-C65CC7D118B5}"/>
               </a:ext>
             </a:extLst>
           </p:cNvPr>
@@ -687,7 +693,7 @@
           <p:cNvPr id="5" name="Footer Placeholder 4">
             <a:extLst>
               <a:ext uri="{FF2B5EF4-FFF2-40B4-BE49-F238E27FC236}">
-                <a16:creationId xmlns:a16="http://schemas.microsoft.com/office/drawing/2014/main" id="{1197070B-DBFE-AEBE-22F0-8E43318BB27F}"/>
+                <a16:creationId xmlns:a16="http://schemas.microsoft.com/office/drawing/2014/main" xmlns="" id="{1197070B-DBFE-AEBE-22F0-8E43318BB27F}"/>
               </a:ext>
             </a:extLst>
           </p:cNvPr>
@@ -712,7 +718,7 @@
           <p:cNvPr id="6" name="Slide Number Placeholder 5">
             <a:extLst>
               <a:ext uri="{FF2B5EF4-FFF2-40B4-BE49-F238E27FC236}">
-                <a16:creationId xmlns:a16="http://schemas.microsoft.com/office/drawing/2014/main" id="{80F01CF0-5CD8-062C-94F9-6B21F5BF42B5}"/>
+                <a16:creationId xmlns:a16="http://schemas.microsoft.com/office/drawing/2014/main" xmlns="" id="{80F01CF0-5CD8-062C-94F9-6B21F5BF42B5}"/>
               </a:ext>
             </a:extLst>
           </p:cNvPr>
@@ -771,7 +777,7 @@
           <p:cNvPr id="2" name="Title 1">
             <a:extLst>
               <a:ext uri="{FF2B5EF4-FFF2-40B4-BE49-F238E27FC236}">
-                <a16:creationId xmlns:a16="http://schemas.microsoft.com/office/drawing/2014/main" id="{A692D3D1-7FAA-3644-219C-C440B81959A5}"/>
+                <a16:creationId xmlns:a16="http://schemas.microsoft.com/office/drawing/2014/main" xmlns="" id="{A692D3D1-7FAA-3644-219C-C440B81959A5}"/>
               </a:ext>
             </a:extLst>
           </p:cNvPr>
@@ -800,7 +806,7 @@
           <p:cNvPr id="3" name="Text Placeholder 2">
             <a:extLst>
               <a:ext uri="{FF2B5EF4-FFF2-40B4-BE49-F238E27FC236}">
-                <a16:creationId xmlns:a16="http://schemas.microsoft.com/office/drawing/2014/main" id="{DBF8BFB5-13F3-3836-74F7-F2529EFD45CB}"/>
+                <a16:creationId xmlns:a16="http://schemas.microsoft.com/office/drawing/2014/main" xmlns="" id="{DBF8BFB5-13F3-3836-74F7-F2529EFD45CB}"/>
               </a:ext>
             </a:extLst>
           </p:cNvPr>
@@ -858,7 +864,7 @@
           <p:cNvPr id="4" name="Date Placeholder 3">
             <a:extLst>
               <a:ext uri="{FF2B5EF4-FFF2-40B4-BE49-F238E27FC236}">
-                <a16:creationId xmlns:a16="http://schemas.microsoft.com/office/drawing/2014/main" id="{13C3E2B6-57D1-3589-C33F-044634958B0A}"/>
+                <a16:creationId xmlns:a16="http://schemas.microsoft.com/office/drawing/2014/main" xmlns="" id="{13C3E2B6-57D1-3589-C33F-044634958B0A}"/>
               </a:ext>
             </a:extLst>
           </p:cNvPr>
@@ -887,7 +893,7 @@
           <p:cNvPr id="5" name="Footer Placeholder 4">
             <a:extLst>
               <a:ext uri="{FF2B5EF4-FFF2-40B4-BE49-F238E27FC236}">
-                <a16:creationId xmlns:a16="http://schemas.microsoft.com/office/drawing/2014/main" id="{F98B0EF2-7856-00FE-5336-7F9F22541C91}"/>
+                <a16:creationId xmlns:a16="http://schemas.microsoft.com/office/drawing/2014/main" xmlns="" id="{F98B0EF2-7856-00FE-5336-7F9F22541C91}"/>
               </a:ext>
             </a:extLst>
           </p:cNvPr>
@@ -912,7 +918,7 @@
           <p:cNvPr id="6" name="Slide Number Placeholder 5">
             <a:extLst>
               <a:ext uri="{FF2B5EF4-FFF2-40B4-BE49-F238E27FC236}">
-                <a16:creationId xmlns:a16="http://schemas.microsoft.com/office/drawing/2014/main" id="{82535B0C-D772-4DC4-0020-B2C9DC3B23AA}"/>
+                <a16:creationId xmlns:a16="http://schemas.microsoft.com/office/drawing/2014/main" xmlns="" id="{82535B0C-D772-4DC4-0020-B2C9DC3B23AA}"/>
               </a:ext>
             </a:extLst>
           </p:cNvPr>
@@ -971,7 +977,7 @@
           <p:cNvPr id="2" name="Title 1">
             <a:extLst>
               <a:ext uri="{FF2B5EF4-FFF2-40B4-BE49-F238E27FC236}">
-                <a16:creationId xmlns:a16="http://schemas.microsoft.com/office/drawing/2014/main" id="{6BC0CFD8-A7C9-FAEC-A39F-BE554DACD537}"/>
+                <a16:creationId xmlns:a16="http://schemas.microsoft.com/office/drawing/2014/main" xmlns="" id="{6BC0CFD8-A7C9-FAEC-A39F-BE554DACD537}"/>
               </a:ext>
             </a:extLst>
           </p:cNvPr>
@@ -1000,7 +1006,7 @@
           <p:cNvPr id="3" name="Content Placeholder 2">
             <a:extLst>
               <a:ext uri="{FF2B5EF4-FFF2-40B4-BE49-F238E27FC236}">
-                <a16:creationId xmlns:a16="http://schemas.microsoft.com/office/drawing/2014/main" id="{3761E0EA-C3BB-2ABF-2FED-38361E1A877F}"/>
+                <a16:creationId xmlns:a16="http://schemas.microsoft.com/office/drawing/2014/main" xmlns="" id="{3761E0EA-C3BB-2ABF-2FED-38361E1A877F}"/>
               </a:ext>
             </a:extLst>
           </p:cNvPr>
@@ -1058,7 +1064,7 @@
           <p:cNvPr id="4" name="Date Placeholder 3">
             <a:extLst>
               <a:ext uri="{FF2B5EF4-FFF2-40B4-BE49-F238E27FC236}">
-                <a16:creationId xmlns:a16="http://schemas.microsoft.com/office/drawing/2014/main" id="{2BE47DCB-B6DB-DF32-EB57-B4538F7B4AB3}"/>
+                <a16:creationId xmlns:a16="http://schemas.microsoft.com/office/drawing/2014/main" xmlns="" id="{2BE47DCB-B6DB-DF32-EB57-B4538F7B4AB3}"/>
               </a:ext>
             </a:extLst>
           </p:cNvPr>
@@ -1087,7 +1093,7 @@
           <p:cNvPr id="5" name="Footer Placeholder 4">
             <a:extLst>
               <a:ext uri="{FF2B5EF4-FFF2-40B4-BE49-F238E27FC236}">
-                <a16:creationId xmlns:a16="http://schemas.microsoft.com/office/drawing/2014/main" id="{81B65618-3107-2C3E-B1A3-E42D62FB4BEA}"/>
+                <a16:creationId xmlns:a16="http://schemas.microsoft.com/office/drawing/2014/main" xmlns="" id="{81B65618-3107-2C3E-B1A3-E42D62FB4BEA}"/>
               </a:ext>
             </a:extLst>
           </p:cNvPr>
@@ -1112,7 +1118,7 @@
           <p:cNvPr id="6" name="Slide Number Placeholder 5">
             <a:extLst>
               <a:ext uri="{FF2B5EF4-FFF2-40B4-BE49-F238E27FC236}">
-                <a16:creationId xmlns:a16="http://schemas.microsoft.com/office/drawing/2014/main" id="{7C90F3FC-1ED7-38B3-929A-343A6422AEDE}"/>
+                <a16:creationId xmlns:a16="http://schemas.microsoft.com/office/drawing/2014/main" xmlns="" id="{7C90F3FC-1ED7-38B3-929A-343A6422AEDE}"/>
               </a:ext>
             </a:extLst>
           </p:cNvPr>
@@ -1171,7 +1177,7 @@
           <p:cNvPr id="2" name="Title 1">
             <a:extLst>
               <a:ext uri="{FF2B5EF4-FFF2-40B4-BE49-F238E27FC236}">
-                <a16:creationId xmlns:a16="http://schemas.microsoft.com/office/drawing/2014/main" id="{2959360E-9B6F-8214-5131-FDDEC895F065}"/>
+                <a16:creationId xmlns:a16="http://schemas.microsoft.com/office/drawing/2014/main" xmlns="" id="{2959360E-9B6F-8214-5131-FDDEC895F065}"/>
               </a:ext>
             </a:extLst>
           </p:cNvPr>
@@ -1209,7 +1215,7 @@
           <p:cNvPr id="3" name="Text Placeholder 2">
             <a:extLst>
               <a:ext uri="{FF2B5EF4-FFF2-40B4-BE49-F238E27FC236}">
-                <a16:creationId xmlns:a16="http://schemas.microsoft.com/office/drawing/2014/main" id="{79EB6FAA-4819-AA11-2AB5-6C5832FFF426}"/>
+                <a16:creationId xmlns:a16="http://schemas.microsoft.com/office/drawing/2014/main" xmlns="" id="{79EB6FAA-4819-AA11-2AB5-6C5832FFF426}"/>
               </a:ext>
             </a:extLst>
           </p:cNvPr>
@@ -1334,7 +1340,7 @@
           <p:cNvPr id="4" name="Date Placeholder 3">
             <a:extLst>
               <a:ext uri="{FF2B5EF4-FFF2-40B4-BE49-F238E27FC236}">
-                <a16:creationId xmlns:a16="http://schemas.microsoft.com/office/drawing/2014/main" id="{54809CA0-87A6-A718-DE65-B67149E0C20B}"/>
+                <a16:creationId xmlns:a16="http://schemas.microsoft.com/office/drawing/2014/main" xmlns="" id="{54809CA0-87A6-A718-DE65-B67149E0C20B}"/>
               </a:ext>
             </a:extLst>
           </p:cNvPr>
@@ -1363,7 +1369,7 @@
           <p:cNvPr id="5" name="Footer Placeholder 4">
             <a:extLst>
               <a:ext uri="{FF2B5EF4-FFF2-40B4-BE49-F238E27FC236}">
-                <a16:creationId xmlns:a16="http://schemas.microsoft.com/office/drawing/2014/main" id="{87FAA28A-262D-AC5C-571D-FED4AB5FB4AF}"/>
+                <a16:creationId xmlns:a16="http://schemas.microsoft.com/office/drawing/2014/main" xmlns="" id="{87FAA28A-262D-AC5C-571D-FED4AB5FB4AF}"/>
               </a:ext>
             </a:extLst>
           </p:cNvPr>
@@ -1388,7 +1394,7 @@
           <p:cNvPr id="6" name="Slide Number Placeholder 5">
             <a:extLst>
               <a:ext uri="{FF2B5EF4-FFF2-40B4-BE49-F238E27FC236}">
-                <a16:creationId xmlns:a16="http://schemas.microsoft.com/office/drawing/2014/main" id="{004192E7-E476-0921-5C7F-815489C479D8}"/>
+                <a16:creationId xmlns:a16="http://schemas.microsoft.com/office/drawing/2014/main" xmlns="" id="{004192E7-E476-0921-5C7F-815489C479D8}"/>
               </a:ext>
             </a:extLst>
           </p:cNvPr>
@@ -1447,7 +1453,7 @@
           <p:cNvPr id="2" name="Title 1">
             <a:extLst>
               <a:ext uri="{FF2B5EF4-FFF2-40B4-BE49-F238E27FC236}">
-                <a16:creationId xmlns:a16="http://schemas.microsoft.com/office/drawing/2014/main" id="{6931F618-9AE2-0659-14BA-DD66BE026A93}"/>
+                <a16:creationId xmlns:a16="http://schemas.microsoft.com/office/drawing/2014/main" xmlns="" id="{6931F618-9AE2-0659-14BA-DD66BE026A93}"/>
               </a:ext>
             </a:extLst>
           </p:cNvPr>
@@ -1476,7 +1482,7 @@
           <p:cNvPr id="3" name="Content Placeholder 2">
             <a:extLst>
               <a:ext uri="{FF2B5EF4-FFF2-40B4-BE49-F238E27FC236}">
-                <a16:creationId xmlns:a16="http://schemas.microsoft.com/office/drawing/2014/main" id="{3AF06E29-1C77-9277-DCC3-9D18142A7575}"/>
+                <a16:creationId xmlns:a16="http://schemas.microsoft.com/office/drawing/2014/main" xmlns="" id="{3AF06E29-1C77-9277-DCC3-9D18142A7575}"/>
               </a:ext>
             </a:extLst>
           </p:cNvPr>
@@ -1539,7 +1545,7 @@
           <p:cNvPr id="4" name="Content Placeholder 3">
             <a:extLst>
               <a:ext uri="{FF2B5EF4-FFF2-40B4-BE49-F238E27FC236}">
-                <a16:creationId xmlns:a16="http://schemas.microsoft.com/office/drawing/2014/main" id="{5F8F59E0-6554-10EE-4DE5-D564884D4E73}"/>
+                <a16:creationId xmlns:a16="http://schemas.microsoft.com/office/drawing/2014/main" xmlns="" id="{5F8F59E0-6554-10EE-4DE5-D564884D4E73}"/>
               </a:ext>
             </a:extLst>
           </p:cNvPr>
@@ -1602,7 +1608,7 @@
           <p:cNvPr id="5" name="Date Placeholder 4">
             <a:extLst>
               <a:ext uri="{FF2B5EF4-FFF2-40B4-BE49-F238E27FC236}">
-                <a16:creationId xmlns:a16="http://schemas.microsoft.com/office/drawing/2014/main" id="{2CDA9EE1-51B8-6F03-DCAD-C7AD92DE4F17}"/>
+                <a16:creationId xmlns:a16="http://schemas.microsoft.com/office/drawing/2014/main" xmlns="" id="{2CDA9EE1-51B8-6F03-DCAD-C7AD92DE4F17}"/>
               </a:ext>
             </a:extLst>
           </p:cNvPr>
@@ -1631,7 +1637,7 @@
           <p:cNvPr id="6" name="Footer Placeholder 5">
             <a:extLst>
               <a:ext uri="{FF2B5EF4-FFF2-40B4-BE49-F238E27FC236}">
-                <a16:creationId xmlns:a16="http://schemas.microsoft.com/office/drawing/2014/main" id="{D4DB80A0-4192-ECFF-A24C-17340530DC6F}"/>
+                <a16:creationId xmlns:a16="http://schemas.microsoft.com/office/drawing/2014/main" xmlns="" id="{D4DB80A0-4192-ECFF-A24C-17340530DC6F}"/>
               </a:ext>
             </a:extLst>
           </p:cNvPr>
@@ -1656,7 +1662,7 @@
           <p:cNvPr id="7" name="Slide Number Placeholder 6">
             <a:extLst>
               <a:ext uri="{FF2B5EF4-FFF2-40B4-BE49-F238E27FC236}">
-                <a16:creationId xmlns:a16="http://schemas.microsoft.com/office/drawing/2014/main" id="{60BE4ABB-B504-F325-B550-BC8072911CF8}"/>
+                <a16:creationId xmlns:a16="http://schemas.microsoft.com/office/drawing/2014/main" xmlns="" id="{60BE4ABB-B504-F325-B550-BC8072911CF8}"/>
               </a:ext>
             </a:extLst>
           </p:cNvPr>
@@ -1715,7 +1721,7 @@
           <p:cNvPr id="2" name="Title 1">
             <a:extLst>
               <a:ext uri="{FF2B5EF4-FFF2-40B4-BE49-F238E27FC236}">
-                <a16:creationId xmlns:a16="http://schemas.microsoft.com/office/drawing/2014/main" id="{4C1E0718-3A97-20F1-1803-58778F644AE2}"/>
+                <a16:creationId xmlns:a16="http://schemas.microsoft.com/office/drawing/2014/main" xmlns="" id="{4C1E0718-3A97-20F1-1803-58778F644AE2}"/>
               </a:ext>
             </a:extLst>
           </p:cNvPr>
@@ -1749,7 +1755,7 @@
           <p:cNvPr id="3" name="Text Placeholder 2">
             <a:extLst>
               <a:ext uri="{FF2B5EF4-FFF2-40B4-BE49-F238E27FC236}">
-                <a16:creationId xmlns:a16="http://schemas.microsoft.com/office/drawing/2014/main" id="{30F1548A-925A-B134-8F7E-AB3560E57872}"/>
+                <a16:creationId xmlns:a16="http://schemas.microsoft.com/office/drawing/2014/main" xmlns="" id="{30F1548A-925A-B134-8F7E-AB3560E57872}"/>
               </a:ext>
             </a:extLst>
           </p:cNvPr>
@@ -1820,7 +1826,7 @@
           <p:cNvPr id="4" name="Content Placeholder 3">
             <a:extLst>
               <a:ext uri="{FF2B5EF4-FFF2-40B4-BE49-F238E27FC236}">
-                <a16:creationId xmlns:a16="http://schemas.microsoft.com/office/drawing/2014/main" id="{CCA0E24D-92A4-C25F-3B7E-ACF3CD72BBED}"/>
+                <a16:creationId xmlns:a16="http://schemas.microsoft.com/office/drawing/2014/main" xmlns="" id="{CCA0E24D-92A4-C25F-3B7E-ACF3CD72BBED}"/>
               </a:ext>
             </a:extLst>
           </p:cNvPr>
@@ -1883,7 +1889,7 @@
           <p:cNvPr id="5" name="Text Placeholder 4">
             <a:extLst>
               <a:ext uri="{FF2B5EF4-FFF2-40B4-BE49-F238E27FC236}">
-                <a16:creationId xmlns:a16="http://schemas.microsoft.com/office/drawing/2014/main" id="{5588D82D-B4D3-DBC2-B08B-CDB7CA744C04}"/>
+                <a16:creationId xmlns:a16="http://schemas.microsoft.com/office/drawing/2014/main" xmlns="" id="{5588D82D-B4D3-DBC2-B08B-CDB7CA744C04}"/>
               </a:ext>
             </a:extLst>
           </p:cNvPr>
@@ -1954,7 +1960,7 @@
           <p:cNvPr id="6" name="Content Placeholder 5">
             <a:extLst>
               <a:ext uri="{FF2B5EF4-FFF2-40B4-BE49-F238E27FC236}">
-                <a16:creationId xmlns:a16="http://schemas.microsoft.com/office/drawing/2014/main" id="{F30F0A33-6601-4789-086B-33BC9493C324}"/>
+                <a16:creationId xmlns:a16="http://schemas.microsoft.com/office/drawing/2014/main" xmlns="" id="{F30F0A33-6601-4789-086B-33BC9493C324}"/>
               </a:ext>
             </a:extLst>
           </p:cNvPr>
@@ -2017,7 +2023,7 @@
           <p:cNvPr id="7" name="Date Placeholder 6">
             <a:extLst>
               <a:ext uri="{FF2B5EF4-FFF2-40B4-BE49-F238E27FC236}">
-                <a16:creationId xmlns:a16="http://schemas.microsoft.com/office/drawing/2014/main" id="{52D3C3C3-D161-819B-B03C-5AD5FB45CD31}"/>
+                <a16:creationId xmlns:a16="http://schemas.microsoft.com/office/drawing/2014/main" xmlns="" id="{52D3C3C3-D161-819B-B03C-5AD5FB45CD31}"/>
               </a:ext>
             </a:extLst>
           </p:cNvPr>
@@ -2046,7 +2052,7 @@
           <p:cNvPr id="8" name="Footer Placeholder 7">
             <a:extLst>
               <a:ext uri="{FF2B5EF4-FFF2-40B4-BE49-F238E27FC236}">
-                <a16:creationId xmlns:a16="http://schemas.microsoft.com/office/drawing/2014/main" id="{EC95785E-3A74-59F1-428E-70B99FD26DEE}"/>
+                <a16:creationId xmlns:a16="http://schemas.microsoft.com/office/drawing/2014/main" xmlns="" id="{EC95785E-3A74-59F1-428E-70B99FD26DEE}"/>
               </a:ext>
             </a:extLst>
           </p:cNvPr>
@@ -2071,7 +2077,7 @@
           <p:cNvPr id="9" name="Slide Number Placeholder 8">
             <a:extLst>
               <a:ext uri="{FF2B5EF4-FFF2-40B4-BE49-F238E27FC236}">
-                <a16:creationId xmlns:a16="http://schemas.microsoft.com/office/drawing/2014/main" id="{C5D7550C-FCBE-49C5-883A-D382E197F58A}"/>
+                <a16:creationId xmlns:a16="http://schemas.microsoft.com/office/drawing/2014/main" xmlns="" id="{C5D7550C-FCBE-49C5-883A-D382E197F58A}"/>
               </a:ext>
             </a:extLst>
           </p:cNvPr>
@@ -2130,7 +2136,7 @@
           <p:cNvPr id="2" name="Title 1">
             <a:extLst>
               <a:ext uri="{FF2B5EF4-FFF2-40B4-BE49-F238E27FC236}">
-                <a16:creationId xmlns:a16="http://schemas.microsoft.com/office/drawing/2014/main" id="{EACA96B1-D61B-9341-8D45-795E7D9F93BD}"/>
+                <a16:creationId xmlns:a16="http://schemas.microsoft.com/office/drawing/2014/main" xmlns="" id="{EACA96B1-D61B-9341-8D45-795E7D9F93BD}"/>
               </a:ext>
             </a:extLst>
           </p:cNvPr>
@@ -2159,7 +2165,7 @@
           <p:cNvPr id="3" name="Date Placeholder 2">
             <a:extLst>
               <a:ext uri="{FF2B5EF4-FFF2-40B4-BE49-F238E27FC236}">
-                <a16:creationId xmlns:a16="http://schemas.microsoft.com/office/drawing/2014/main" id="{27798A04-3D17-2DFD-80B7-FB50C95E8EB4}"/>
+                <a16:creationId xmlns:a16="http://schemas.microsoft.com/office/drawing/2014/main" xmlns="" id="{27798A04-3D17-2DFD-80B7-FB50C95E8EB4}"/>
               </a:ext>
             </a:extLst>
           </p:cNvPr>
@@ -2188,7 +2194,7 @@
           <p:cNvPr id="4" name="Footer Placeholder 3">
             <a:extLst>
               <a:ext uri="{FF2B5EF4-FFF2-40B4-BE49-F238E27FC236}">
-                <a16:creationId xmlns:a16="http://schemas.microsoft.com/office/drawing/2014/main" id="{14348990-ADA5-EEC7-ADED-B27EB6D9FAEE}"/>
+                <a16:creationId xmlns:a16="http://schemas.microsoft.com/office/drawing/2014/main" xmlns="" id="{14348990-ADA5-EEC7-ADED-B27EB6D9FAEE}"/>
               </a:ext>
             </a:extLst>
           </p:cNvPr>
@@ -2213,7 +2219,7 @@
           <p:cNvPr id="5" name="Slide Number Placeholder 4">
             <a:extLst>
               <a:ext uri="{FF2B5EF4-FFF2-40B4-BE49-F238E27FC236}">
-                <a16:creationId xmlns:a16="http://schemas.microsoft.com/office/drawing/2014/main" id="{DD9AC9DB-DCD9-997C-ECB4-EB6A2588841E}"/>
+                <a16:creationId xmlns:a16="http://schemas.microsoft.com/office/drawing/2014/main" xmlns="" id="{DD9AC9DB-DCD9-997C-ECB4-EB6A2588841E}"/>
               </a:ext>
             </a:extLst>
           </p:cNvPr>
@@ -2272,7 +2278,7 @@
           <p:cNvPr id="2" name="Date Placeholder 1">
             <a:extLst>
               <a:ext uri="{FF2B5EF4-FFF2-40B4-BE49-F238E27FC236}">
-                <a16:creationId xmlns:a16="http://schemas.microsoft.com/office/drawing/2014/main" id="{22EEA3EF-2884-032D-739D-8E8F3BB2D27F}"/>
+                <a16:creationId xmlns:a16="http://schemas.microsoft.com/office/drawing/2014/main" xmlns="" id="{22EEA3EF-2884-032D-739D-8E8F3BB2D27F}"/>
               </a:ext>
             </a:extLst>
           </p:cNvPr>
@@ -2301,7 +2307,7 @@
           <p:cNvPr id="3" name="Footer Placeholder 2">
             <a:extLst>
               <a:ext uri="{FF2B5EF4-FFF2-40B4-BE49-F238E27FC236}">
-                <a16:creationId xmlns:a16="http://schemas.microsoft.com/office/drawing/2014/main" id="{37D0F525-771F-B653-8AA4-7F21D275B148}"/>
+                <a16:creationId xmlns:a16="http://schemas.microsoft.com/office/drawing/2014/main" xmlns="" id="{37D0F525-771F-B653-8AA4-7F21D275B148}"/>
               </a:ext>
             </a:extLst>
           </p:cNvPr>
@@ -2326,7 +2332,7 @@
           <p:cNvPr id="4" name="Slide Number Placeholder 3">
             <a:extLst>
               <a:ext uri="{FF2B5EF4-FFF2-40B4-BE49-F238E27FC236}">
-                <a16:creationId xmlns:a16="http://schemas.microsoft.com/office/drawing/2014/main" id="{36B2795A-026D-7255-682C-D1032FF91A98}"/>
+                <a16:creationId xmlns:a16="http://schemas.microsoft.com/office/drawing/2014/main" xmlns="" id="{36B2795A-026D-7255-682C-D1032FF91A98}"/>
               </a:ext>
             </a:extLst>
           </p:cNvPr>
@@ -2385,7 +2391,7 @@
           <p:cNvPr id="2" name="Title 1">
             <a:extLst>
               <a:ext uri="{FF2B5EF4-FFF2-40B4-BE49-F238E27FC236}">
-                <a16:creationId xmlns:a16="http://schemas.microsoft.com/office/drawing/2014/main" id="{C4758136-80A2-4133-23D2-4BF0732AC7A5}"/>
+                <a16:creationId xmlns:a16="http://schemas.microsoft.com/office/drawing/2014/main" xmlns="" id="{C4758136-80A2-4133-23D2-4BF0732AC7A5}"/>
               </a:ext>
             </a:extLst>
           </p:cNvPr>
@@ -2423,7 +2429,7 @@
           <p:cNvPr id="3" name="Content Placeholder 2">
             <a:extLst>
               <a:ext uri="{FF2B5EF4-FFF2-40B4-BE49-F238E27FC236}">
-                <a16:creationId xmlns:a16="http://schemas.microsoft.com/office/drawing/2014/main" id="{42B7EC72-4E52-862B-855A-93F310D642EC}"/>
+                <a16:creationId xmlns:a16="http://schemas.microsoft.com/office/drawing/2014/main" xmlns="" id="{42B7EC72-4E52-862B-855A-93F310D642EC}"/>
               </a:ext>
             </a:extLst>
           </p:cNvPr>
@@ -2514,7 +2520,7 @@
           <p:cNvPr id="4" name="Text Placeholder 3">
             <a:extLst>
               <a:ext uri="{FF2B5EF4-FFF2-40B4-BE49-F238E27FC236}">
-                <a16:creationId xmlns:a16="http://schemas.microsoft.com/office/drawing/2014/main" id="{5F2051EF-706C-677E-E084-ED428A7A23F6}"/>
+                <a16:creationId xmlns:a16="http://schemas.microsoft.com/office/drawing/2014/main" xmlns="" id="{5F2051EF-706C-677E-E084-ED428A7A23F6}"/>
               </a:ext>
             </a:extLst>
           </p:cNvPr>
@@ -2585,7 +2591,7 @@
           <p:cNvPr id="5" name="Date Placeholder 4">
             <a:extLst>
               <a:ext uri="{FF2B5EF4-FFF2-40B4-BE49-F238E27FC236}">
-                <a16:creationId xmlns:a16="http://schemas.microsoft.com/office/drawing/2014/main" id="{2F876200-0DD6-60FB-CCE3-F436AA392902}"/>
+                <a16:creationId xmlns:a16="http://schemas.microsoft.com/office/drawing/2014/main" xmlns="" id="{2F876200-0DD6-60FB-CCE3-F436AA392902}"/>
               </a:ext>
             </a:extLst>
           </p:cNvPr>
@@ -2614,7 +2620,7 @@
           <p:cNvPr id="6" name="Footer Placeholder 5">
             <a:extLst>
               <a:ext uri="{FF2B5EF4-FFF2-40B4-BE49-F238E27FC236}">
-                <a16:creationId xmlns:a16="http://schemas.microsoft.com/office/drawing/2014/main" id="{D90F3B6D-0978-5562-CBDF-C45AD52155CC}"/>
+                <a16:creationId xmlns:a16="http://schemas.microsoft.com/office/drawing/2014/main" xmlns="" id="{D90F3B6D-0978-5562-CBDF-C45AD52155CC}"/>
               </a:ext>
             </a:extLst>
           </p:cNvPr>
@@ -2639,7 +2645,7 @@
           <p:cNvPr id="7" name="Slide Number Placeholder 6">
             <a:extLst>
               <a:ext uri="{FF2B5EF4-FFF2-40B4-BE49-F238E27FC236}">
-                <a16:creationId xmlns:a16="http://schemas.microsoft.com/office/drawing/2014/main" id="{BD5A918F-353B-9365-D415-62180FF56A59}"/>
+                <a16:creationId xmlns:a16="http://schemas.microsoft.com/office/drawing/2014/main" xmlns="" id="{BD5A918F-353B-9365-D415-62180FF56A59}"/>
               </a:ext>
             </a:extLst>
           </p:cNvPr>
@@ -2698,7 +2704,7 @@
           <p:cNvPr id="2" name="Title 1">
             <a:extLst>
               <a:ext uri="{FF2B5EF4-FFF2-40B4-BE49-F238E27FC236}">
-                <a16:creationId xmlns:a16="http://schemas.microsoft.com/office/drawing/2014/main" id="{A7A44615-09A8-105B-92A9-8EA0AA5504ED}"/>
+                <a16:creationId xmlns:a16="http://schemas.microsoft.com/office/drawing/2014/main" xmlns="" id="{A7A44615-09A8-105B-92A9-8EA0AA5504ED}"/>
               </a:ext>
             </a:extLst>
           </p:cNvPr>
@@ -2736,7 +2742,7 @@
           <p:cNvPr id="3" name="Picture Placeholder 2">
             <a:extLst>
               <a:ext uri="{FF2B5EF4-FFF2-40B4-BE49-F238E27FC236}">
-                <a16:creationId xmlns:a16="http://schemas.microsoft.com/office/drawing/2014/main" id="{6570ECEF-B65F-10F3-6EED-7447864E671E}"/>
+                <a16:creationId xmlns:a16="http://schemas.microsoft.com/office/drawing/2014/main" xmlns="" id="{6570ECEF-B65F-10F3-6EED-7447864E671E}"/>
               </a:ext>
             </a:extLst>
           </p:cNvPr>
@@ -2803,7 +2809,7 @@
           <p:cNvPr id="4" name="Text Placeholder 3">
             <a:extLst>
               <a:ext uri="{FF2B5EF4-FFF2-40B4-BE49-F238E27FC236}">
-                <a16:creationId xmlns:a16="http://schemas.microsoft.com/office/drawing/2014/main" id="{1628D997-0AE0-43F4-A4E9-4C67D089E5BB}"/>
+                <a16:creationId xmlns:a16="http://schemas.microsoft.com/office/drawing/2014/main" xmlns="" id="{1628D997-0AE0-43F4-A4E9-4C67D089E5BB}"/>
               </a:ext>
             </a:extLst>
           </p:cNvPr>
@@ -2874,7 +2880,7 @@
           <p:cNvPr id="5" name="Date Placeholder 4">
             <a:extLst>
               <a:ext uri="{FF2B5EF4-FFF2-40B4-BE49-F238E27FC236}">
-                <a16:creationId xmlns:a16="http://schemas.microsoft.com/office/drawing/2014/main" id="{32804419-3495-DCB4-50C1-E68AAEECE406}"/>
+                <a16:creationId xmlns:a16="http://schemas.microsoft.com/office/drawing/2014/main" xmlns="" id="{32804419-3495-DCB4-50C1-E68AAEECE406}"/>
               </a:ext>
             </a:extLst>
           </p:cNvPr>
@@ -2903,7 +2909,7 @@
           <p:cNvPr id="6" name="Footer Placeholder 5">
             <a:extLst>
               <a:ext uri="{FF2B5EF4-FFF2-40B4-BE49-F238E27FC236}">
-                <a16:creationId xmlns:a16="http://schemas.microsoft.com/office/drawing/2014/main" id="{7409FD29-0936-7690-CF22-89458E789D8C}"/>
+                <a16:creationId xmlns:a16="http://schemas.microsoft.com/office/drawing/2014/main" xmlns="" id="{7409FD29-0936-7690-CF22-89458E789D8C}"/>
               </a:ext>
             </a:extLst>
           </p:cNvPr>
@@ -2928,7 +2934,7 @@
           <p:cNvPr id="7" name="Slide Number Placeholder 6">
             <a:extLst>
               <a:ext uri="{FF2B5EF4-FFF2-40B4-BE49-F238E27FC236}">
-                <a16:creationId xmlns:a16="http://schemas.microsoft.com/office/drawing/2014/main" id="{6A66B1EE-C3A0-F826-3FA7-0D5F4AC63B7C}"/>
+                <a16:creationId xmlns:a16="http://schemas.microsoft.com/office/drawing/2014/main" xmlns="" id="{6A66B1EE-C3A0-F826-3FA7-0D5F4AC63B7C}"/>
               </a:ext>
             </a:extLst>
           </p:cNvPr>
@@ -2992,7 +2998,7 @@
           <p:cNvPr id="2" name="Title Placeholder 1">
             <a:extLst>
               <a:ext uri="{FF2B5EF4-FFF2-40B4-BE49-F238E27FC236}">
-                <a16:creationId xmlns:a16="http://schemas.microsoft.com/office/drawing/2014/main" id="{DB42ACBB-54CF-1572-36A7-9544654B8801}"/>
+                <a16:creationId xmlns:a16="http://schemas.microsoft.com/office/drawing/2014/main" xmlns="" id="{DB42ACBB-54CF-1572-36A7-9544654B8801}"/>
               </a:ext>
             </a:extLst>
           </p:cNvPr>
@@ -3031,7 +3037,7 @@
           <p:cNvPr id="3" name="Text Placeholder 2">
             <a:extLst>
               <a:ext uri="{FF2B5EF4-FFF2-40B4-BE49-F238E27FC236}">
-                <a16:creationId xmlns:a16="http://schemas.microsoft.com/office/drawing/2014/main" id="{E9766A34-5D38-7E90-1685-0CCE3C96E81C}"/>
+                <a16:creationId xmlns:a16="http://schemas.microsoft.com/office/drawing/2014/main" xmlns="" id="{E9766A34-5D38-7E90-1685-0CCE3C96E81C}"/>
               </a:ext>
             </a:extLst>
           </p:cNvPr>
@@ -3099,7 +3105,7 @@
           <p:cNvPr id="4" name="Date Placeholder 3">
             <a:extLst>
               <a:ext uri="{FF2B5EF4-FFF2-40B4-BE49-F238E27FC236}">
-                <a16:creationId xmlns:a16="http://schemas.microsoft.com/office/drawing/2014/main" id="{93F028ED-E567-17CE-1A29-BD500890A9CB}"/>
+                <a16:creationId xmlns:a16="http://schemas.microsoft.com/office/drawing/2014/main" xmlns="" id="{93F028ED-E567-17CE-1A29-BD500890A9CB}"/>
               </a:ext>
             </a:extLst>
           </p:cNvPr>
@@ -3146,7 +3152,7 @@
           <p:cNvPr id="5" name="Footer Placeholder 4">
             <a:extLst>
               <a:ext uri="{FF2B5EF4-FFF2-40B4-BE49-F238E27FC236}">
-                <a16:creationId xmlns:a16="http://schemas.microsoft.com/office/drawing/2014/main" id="{F812B79B-1741-168B-941F-BA9F53A0AEF7}"/>
+                <a16:creationId xmlns:a16="http://schemas.microsoft.com/office/drawing/2014/main" xmlns="" id="{F812B79B-1741-168B-941F-BA9F53A0AEF7}"/>
               </a:ext>
             </a:extLst>
           </p:cNvPr>
@@ -3189,7 +3195,7 @@
           <p:cNvPr id="6" name="Slide Number Placeholder 5">
             <a:extLst>
               <a:ext uri="{FF2B5EF4-FFF2-40B4-BE49-F238E27FC236}">
-                <a16:creationId xmlns:a16="http://schemas.microsoft.com/office/drawing/2014/main" id="{7D8053AA-C4CE-6F4C-D496-18E9CCC11818}"/>
+                <a16:creationId xmlns:a16="http://schemas.microsoft.com/office/drawing/2014/main" xmlns="" id="{7D8053AA-C4CE-6F4C-D496-18E9CCC11818}"/>
               </a:ext>
             </a:extLst>
           </p:cNvPr>
@@ -3558,7 +3564,7 @@
           <p:cNvPr id="2" name="Title 1">
             <a:extLst>
               <a:ext uri="{FF2B5EF4-FFF2-40B4-BE49-F238E27FC236}">
-                <a16:creationId xmlns:a16="http://schemas.microsoft.com/office/drawing/2014/main" id="{5D24CF52-3C48-290A-5D36-A2FCE272C7B9}"/>
+                <a16:creationId xmlns:a16="http://schemas.microsoft.com/office/drawing/2014/main" xmlns="" id="{5D24CF52-3C48-290A-5D36-A2FCE272C7B9}"/>
               </a:ext>
             </a:extLst>
           </p:cNvPr>
@@ -3569,13 +3575,18 @@
             <p:ph type="ctrTitle"/>
           </p:nvPr>
         </p:nvSpPr>
-        <p:spPr/>
-        <p:txBody>
-          <a:bodyPr/>
-          <a:lstStyle/>
-          <a:p>
-            <a:r>
-              <a:rPr lang="en-IN"/>
+        <p:spPr>
+          <a:xfrm>
+            <a:off x="1524000" y="671987"/>
+            <a:ext cx="9144000" cy="2387600"/>
+          </a:xfrm>
+        </p:spPr>
+        <p:txBody>
+          <a:bodyPr/>
+          <a:lstStyle/>
+          <a:p>
+            <a:r>
+              <a:rPr lang="en-IN" dirty="0"/>
               <a:t>Smart Guided Troubleshooting Engine</a:t>
             </a:r>
           </a:p>
@@ -3586,7 +3597,7 @@
           <p:cNvPr id="3" name="Subtitle 2">
             <a:extLst>
               <a:ext uri="{FF2B5EF4-FFF2-40B4-BE49-F238E27FC236}">
-                <a16:creationId xmlns:a16="http://schemas.microsoft.com/office/drawing/2014/main" id="{0CAF00F2-6B37-10F9-744D-C1FB67442D94}"/>
+                <a16:creationId xmlns:a16="http://schemas.microsoft.com/office/drawing/2014/main" xmlns="" id="{0CAF00F2-6B37-10F9-744D-C1FB67442D94}"/>
               </a:ext>
             </a:extLst>
           </p:cNvPr>
@@ -3597,39 +3608,72 @@
             <p:ph type="subTitle" idx="1"/>
           </p:nvPr>
         </p:nvSpPr>
-        <p:spPr/>
+        <p:spPr>
+          <a:xfrm>
+            <a:off x="1524000" y="3602037"/>
+            <a:ext cx="9144000" cy="2075431"/>
+          </a:xfrm>
+        </p:spPr>
         <p:txBody>
           <a:bodyPr>
-            <a:normAutofit fontScale="77500" lnSpcReduction="20000"/>
+            <a:normAutofit fontScale="92500" lnSpcReduction="10000"/>
           </a:bodyPr>
           <a:lstStyle/>
           <a:p>
             <a:r>
-              <a:rPr lang="en-IN"/>
+              <a:rPr lang="en-IN" b="1" dirty="0"/>
               <a:t>Samsung PRISM Generative AI Hackathon (3rd Edition 2026-27)</a:t>
             </a:r>
           </a:p>
           <a:p>
             <a:r>
-              <a:rPr lang="en-IN"/>
+              <a:rPr lang="en-IN" dirty="0"/>
               <a:t>Theme ID: Theme 02 | Team Name: TWT</a:t>
             </a:r>
           </a:p>
           <a:p>
             <a:r>
-              <a:rPr lang="en-IN"/>
-              <a:t>College: M. S. Ramaiah Institute of Technology (MSRIT)</a:t>
-            </a:r>
-          </a:p>
-          <a:p>
-            <a:r>
-              <a:rPr lang="en-IN"/>
-              <a:t>Members: Vedanth Ramesh, Sanjay P, Yadav Yashwin, Vasanth Kumar</a:t>
-            </a:r>
-          </a:p>
-          <a:p>
-            <a:r>
-              <a:rPr lang="en-IN"/>
+              <a:rPr lang="en-IN" dirty="0"/>
+              <a:t>College: M. S. </a:t>
+            </a:r>
+            <a:r>
+              <a:rPr lang="en-IN" dirty="0" err="1"/>
+              <a:t>Ramaiah</a:t>
+            </a:r>
+            <a:r>
+              <a:rPr lang="en-IN" dirty="0"/>
+              <a:t> Institute of Technology (MSRIT)</a:t>
+            </a:r>
+          </a:p>
+          <a:p>
+            <a:r>
+              <a:rPr lang="en-IN" dirty="0"/>
+              <a:t>Members: </a:t>
+            </a:r>
+            <a:r>
+              <a:rPr lang="en-IN" dirty="0" err="1"/>
+              <a:t>Vedanth</a:t>
+            </a:r>
+            <a:r>
+              <a:rPr lang="en-IN" dirty="0"/>
+              <a:t> Ramesh, Sanjay </a:t>
+            </a:r>
+            <a:r>
+              <a:rPr lang="en-IN" dirty="0" smtClean="0"/>
+              <a:t>P Yadav, Yashwin Krishnaa, </a:t>
+            </a:r>
+            <a:r>
+              <a:rPr lang="en-IN" dirty="0" err="1"/>
+              <a:t>Vasanth</a:t>
+            </a:r>
+            <a:r>
+              <a:rPr lang="en-IN" dirty="0"/>
+              <a:t> Kumar</a:t>
+            </a:r>
+          </a:p>
+          <a:p>
+            <a:r>
+              <a:rPr lang="en-IN" dirty="0"/>
               <a:t>GitHub: https://github.com/ADVENTH007/theme02-troubleshooting-engine</a:t>
             </a:r>
           </a:p>
@@ -3670,7 +3714,7 @@
           <p:cNvPr id="2" name="Title 1">
             <a:extLst>
               <a:ext uri="{FF2B5EF4-FFF2-40B4-BE49-F238E27FC236}">
-                <a16:creationId xmlns:a16="http://schemas.microsoft.com/office/drawing/2014/main" id="{0354C9FD-940F-9DDF-9B37-CA93ECB9C892}"/>
+                <a16:creationId xmlns:a16="http://schemas.microsoft.com/office/drawing/2014/main" xmlns="" id="{75CD6C45-5792-D034-BFD8-89D0D0A4F6BD}"/>
               </a:ext>
             </a:extLst>
           </p:cNvPr>
@@ -3688,7 +3732,7 @@
           <a:p>
             <a:r>
               <a:rPr lang="en-IN"/>
-              <a:t>Differentiation (Brownie Points)</a:t>
+              <a:t>What's Next</a:t>
             </a:r>
           </a:p>
         </p:txBody>
@@ -3698,7 +3742,7 @@
           <p:cNvPr id="3" name="Text Placeholder 2">
             <a:extLst>
               <a:ext uri="{FF2B5EF4-FFF2-40B4-BE49-F238E27FC236}">
-                <a16:creationId xmlns:a16="http://schemas.microsoft.com/office/drawing/2014/main" id="{938F3860-F97B-DED4-CA03-177FAB256DE1}"/>
+                <a16:creationId xmlns:a16="http://schemas.microsoft.com/office/drawing/2014/main" xmlns="" id="{4DC70A2A-49A1-8CC8-0CB4-F604D57191BE}"/>
               </a:ext>
             </a:extLst>
           </p:cNvPr>
@@ -3715,44 +3759,62 @@
           <a:lstStyle/>
           <a:p>
             <a:r>
-              <a:rPr lang="en-IN"/>
-              <a:t>- Static SIIS Articles: Raw HTML, slow reading, no direct actions.</a:t>
-            </a:r>
-          </a:p>
-          <a:p>
-            <a:r>
-              <a:rPr lang="en-IN"/>
-              <a:t>- Generic AI Chatbots: Unstructured text, hallucination risk, high cloud API latency.</a:t>
-            </a:r>
-          </a:p>
-          <a:p>
-            <a:r>
-              <a:rPr lang="en-IN"/>
-              <a:t>- Our Smart Guided Engine:</a:t>
-            </a:r>
-          </a:p>
-          <a:p>
-            <a:r>
-              <a:rPr lang="en-IN"/>
-              <a:t>  * Validated Step-Group JSON</a:t>
-            </a:r>
-          </a:p>
-          <a:p>
-            <a:r>
-              <a:rPr lang="en-IN"/>
-              <a:t>  * 100% Grounded &amp; Deterministic</a:t>
-            </a:r>
-          </a:p>
-          <a:p>
-            <a:r>
-              <a:rPr lang="en-IN"/>
-              <a:t>  * Actionable bixby:// Deeplinks</a:t>
-            </a:r>
-          </a:p>
-          <a:p>
-            <a:r>
-              <a:rPr lang="en-IN"/>
-              <a:t>  * Sub-Millisecond Speed (0.48ms)</a:t>
+              <a:rPr lang="en-IN" dirty="0" smtClean="0"/>
+              <a:t>Multi-Device </a:t>
+            </a:r>
+            <a:r>
+              <a:rPr lang="en-IN" dirty="0" err="1"/>
+              <a:t>IoT</a:t>
+            </a:r>
+            <a:r>
+              <a:rPr lang="en-IN" dirty="0"/>
+              <a:t> Expansion: Integrate SmartThings and wearables content.</a:t>
+            </a:r>
+          </a:p>
+          <a:p>
+            <a:r>
+              <a:rPr lang="en-IN" dirty="0" smtClean="0"/>
+              <a:t>Edge </a:t>
+            </a:r>
+            <a:r>
+              <a:rPr lang="en-IN" dirty="0"/>
+              <a:t>Quantization: Convert </a:t>
+            </a:r>
+            <a:r>
+              <a:rPr lang="en-IN" dirty="0" err="1"/>
+              <a:t>embeddings</a:t>
+            </a:r>
+            <a:r>
+              <a:rPr lang="en-IN" dirty="0"/>
+              <a:t> model to ONNX/</a:t>
+            </a:r>
+            <a:r>
+              <a:rPr lang="en-IN" dirty="0" err="1"/>
+              <a:t>CoreML</a:t>
+            </a:r>
+            <a:r>
+              <a:rPr lang="en-IN" dirty="0"/>
+              <a:t> for on-device mobile inference.</a:t>
+            </a:r>
+          </a:p>
+          <a:p>
+            <a:r>
+              <a:rPr lang="en-IN" dirty="0" smtClean="0"/>
+              <a:t>Multilingual </a:t>
+            </a:r>
+            <a:r>
+              <a:rPr lang="en-IN" dirty="0"/>
+              <a:t>Support: Add local language translations for global Bixby actions.</a:t>
+            </a:r>
+          </a:p>
+          <a:p>
+            <a:r>
+              <a:rPr lang="en-IN" dirty="0" smtClean="0"/>
+              <a:t>Enterprise </a:t>
+            </a:r>
+            <a:r>
+              <a:rPr lang="en-IN" dirty="0"/>
+              <a:t>CI/CD Pipeline: Automated sync with SIIS content updates.</a:t>
             </a:r>
           </a:p>
         </p:txBody>
@@ -3760,7 +3822,7 @@
     </p:spTree>
     <p:extLst>
       <p:ext uri="{BB962C8B-B14F-4D97-AF65-F5344CB8AC3E}">
-        <p14:creationId xmlns:p14="http://schemas.microsoft.com/office/powerpoint/2010/main" val="1823140365"/>
+        <p14:creationId xmlns:p14="http://schemas.microsoft.com/office/powerpoint/2010/main" val="606432213"/>
       </p:ext>
     </p:extLst>
   </p:cSld>
@@ -3792,7 +3854,7 @@
           <p:cNvPr id="2" name="Title 1">
             <a:extLst>
               <a:ext uri="{FF2B5EF4-FFF2-40B4-BE49-F238E27FC236}">
-                <a16:creationId xmlns:a16="http://schemas.microsoft.com/office/drawing/2014/main" id="{866F7E97-8FE8-D154-9095-8D426889096A}"/>
+                <a16:creationId xmlns:a16="http://schemas.microsoft.com/office/drawing/2014/main" xmlns="" id="{0354C9FD-940F-9DDF-9B37-CA93ECB9C892}"/>
               </a:ext>
             </a:extLst>
           </p:cNvPr>
@@ -3810,6 +3872,185 @@
           <a:p>
             <a:r>
               <a:rPr lang="en-IN"/>
+              <a:t>Differentiation (Brownie Points)</a:t>
+            </a:r>
+          </a:p>
+        </p:txBody>
+      </p:sp>
+      <p:sp>
+        <p:nvSpPr>
+          <p:cNvPr id="3" name="Text Placeholder 2">
+            <a:extLst>
+              <a:ext uri="{FF2B5EF4-FFF2-40B4-BE49-F238E27FC236}">
+                <a16:creationId xmlns:a16="http://schemas.microsoft.com/office/drawing/2014/main" xmlns="" id="{938F3860-F97B-DED4-CA03-177FAB256DE1}"/>
+              </a:ext>
+            </a:extLst>
+          </p:cNvPr>
+          <p:cNvSpPr>
+            <a:spLocks noGrp="1"/>
+          </p:cNvSpPr>
+          <p:nvPr>
+            <p:ph type="body" idx="1"/>
+          </p:nvPr>
+        </p:nvSpPr>
+        <p:spPr/>
+        <p:txBody>
+          <a:bodyPr/>
+          <a:lstStyle/>
+          <a:p>
+            <a:r>
+              <a:rPr lang="en-IN" dirty="0" smtClean="0"/>
+              <a:t>Static </a:t>
+            </a:r>
+            <a:r>
+              <a:rPr lang="en-IN" dirty="0"/>
+              <a:t>SIIS Articles: Raw HTML, slow reading, no direct actions.</a:t>
+            </a:r>
+          </a:p>
+          <a:p>
+            <a:r>
+              <a:rPr lang="en-IN" dirty="0" smtClean="0"/>
+              <a:t>Generic </a:t>
+            </a:r>
+            <a:r>
+              <a:rPr lang="en-IN" dirty="0"/>
+              <a:t>AI </a:t>
+            </a:r>
+            <a:r>
+              <a:rPr lang="en-IN" dirty="0" err="1"/>
+              <a:t>Chatbots</a:t>
+            </a:r>
+            <a:r>
+              <a:rPr lang="en-IN" dirty="0"/>
+              <a:t>: Unstructured text, hallucination risk, high cloud API latency.</a:t>
+            </a:r>
+          </a:p>
+          <a:p>
+            <a:r>
+              <a:rPr lang="en-IN" dirty="0" smtClean="0"/>
+              <a:t>Our </a:t>
+            </a:r>
+            <a:r>
+              <a:rPr lang="en-IN" dirty="0"/>
+              <a:t>Smart Guided Engine:</a:t>
+            </a:r>
+          </a:p>
+          <a:p>
+            <a:pPr marL="0" indent="0">
+              <a:buNone/>
+            </a:pPr>
+            <a:r>
+              <a:rPr lang="en-IN" dirty="0" smtClean="0"/>
+              <a:t> </a:t>
+            </a:r>
+            <a:r>
+              <a:rPr lang="en-IN" dirty="0"/>
+              <a:t>* Validated Step-Group </a:t>
+            </a:r>
+            <a:r>
+              <a:rPr lang="en-IN" dirty="0" smtClean="0"/>
+              <a:t>JSON</a:t>
+            </a:r>
+          </a:p>
+          <a:p>
+            <a:pPr marL="0" indent="0">
+              <a:buNone/>
+            </a:pPr>
+            <a:r>
+              <a:rPr lang="en-IN" dirty="0" smtClean="0"/>
+              <a:t> </a:t>
+            </a:r>
+            <a:r>
+              <a:rPr lang="en-IN" dirty="0"/>
+              <a:t>* 100% Grounded &amp; Deterministic</a:t>
+            </a:r>
+          </a:p>
+          <a:p>
+            <a:pPr marL="0" indent="0">
+              <a:buNone/>
+            </a:pPr>
+            <a:r>
+              <a:rPr lang="en-IN" dirty="0" smtClean="0"/>
+              <a:t> </a:t>
+            </a:r>
+            <a:r>
+              <a:rPr lang="en-IN" dirty="0"/>
+              <a:t>* Actionable bixby:// </a:t>
+            </a:r>
+            <a:r>
+              <a:rPr lang="en-IN" dirty="0" err="1"/>
+              <a:t>Deeplinks</a:t>
+            </a:r>
+            <a:endParaRPr lang="en-IN" dirty="0"/>
+          </a:p>
+          <a:p>
+            <a:pPr marL="0" indent="0">
+              <a:buNone/>
+            </a:pPr>
+            <a:r>
+              <a:rPr lang="en-IN" dirty="0" smtClean="0"/>
+              <a:t> </a:t>
+            </a:r>
+            <a:r>
+              <a:rPr lang="en-IN" dirty="0"/>
+              <a:t>* Sub-Millisecond Speed (0.48ms)</a:t>
+            </a:r>
+          </a:p>
+        </p:txBody>
+      </p:sp>
+    </p:spTree>
+    <p:extLst>
+      <p:ext uri="{BB962C8B-B14F-4D97-AF65-F5344CB8AC3E}">
+        <p14:creationId xmlns:p14="http://schemas.microsoft.com/office/powerpoint/2010/main" val="1823140365"/>
+      </p:ext>
+    </p:extLst>
+  </p:cSld>
+  <p:clrMapOvr>
+    <a:masterClrMapping/>
+  </p:clrMapOvr>
+</p:sld>
+</file>
+
+<file path=ppt/slides/slide12.xml><?xml version="1.0" encoding="utf-8"?>
+<p:sld xmlns:a="http://schemas.openxmlformats.org/drawingml/2006/main" xmlns:r="http://schemas.openxmlformats.org/officeDocument/2006/relationships" xmlns:p="http://schemas.openxmlformats.org/presentationml/2006/main">
+  <p:cSld>
+    <p:spTree>
+      <p:nvGrpSpPr>
+        <p:cNvPr id="1" name=""/>
+        <p:cNvGrpSpPr/>
+        <p:nvPr/>
+      </p:nvGrpSpPr>
+      <p:grpSpPr>
+        <a:xfrm>
+          <a:off x="0" y="0"/>
+          <a:ext cx="0" cy="0"/>
+          <a:chOff x="0" y="0"/>
+          <a:chExt cx="0" cy="0"/>
+        </a:xfrm>
+      </p:grpSpPr>
+      <p:sp>
+        <p:nvSpPr>
+          <p:cNvPr id="2" name="Title 1">
+            <a:extLst>
+              <a:ext uri="{FF2B5EF4-FFF2-40B4-BE49-F238E27FC236}">
+                <a16:creationId xmlns:a16="http://schemas.microsoft.com/office/drawing/2014/main" xmlns="" id="{866F7E97-8FE8-D154-9095-8D426889096A}"/>
+              </a:ext>
+            </a:extLst>
+          </p:cNvPr>
+          <p:cNvSpPr>
+            <a:spLocks noGrp="1"/>
+          </p:cNvSpPr>
+          <p:nvPr>
+            <p:ph type="title"/>
+          </p:nvPr>
+        </p:nvSpPr>
+        <p:spPr/>
+        <p:txBody>
+          <a:bodyPr/>
+          <a:lstStyle/>
+          <a:p>
+            <a:r>
+              <a:rPr lang="en-IN" dirty="0"/>
               <a:t>Submission Readiness Checklist</a:t>
             </a:r>
           </a:p>
@@ -3820,7 +4061,7 @@
           <p:cNvPr id="3" name="Text Placeholder 2">
             <a:extLst>
               <a:ext uri="{FF2B5EF4-FFF2-40B4-BE49-F238E27FC236}">
-                <a16:creationId xmlns:a16="http://schemas.microsoft.com/office/drawing/2014/main" id="{5B3BCDB1-F70A-8443-AA69-5011E23D0E1A}"/>
+                <a16:creationId xmlns:a16="http://schemas.microsoft.com/office/drawing/2014/main" xmlns="" id="{5B3BCDB1-F70A-8443-AA69-5011E23D0E1A}"/>
               </a:ext>
             </a:extLst>
           </p:cNvPr>
@@ -3836,33 +4077,84 @@
           <a:bodyPr/>
           <a:lstStyle/>
           <a:p>
-            <a:r>
-              <a:rPr lang="en-IN"/>
-              <a:t>[X] Working Prototype Code: Public GitHub repository uploaded.</a:t>
-            </a:r>
-          </a:p>
-          <a:p>
-            <a:r>
-              <a:rPr lang="en-IN"/>
-              <a:t>[X] Reproducible Build: Dockerfile with INSTALL_EMBEDDINGS=true.</a:t>
-            </a:r>
-          </a:p>
-          <a:p>
-            <a:r>
-              <a:rPr lang="en-IN"/>
-              <a:t>[X] Documentation: Full README.md with setup instructions.</a:t>
-            </a:r>
-          </a:p>
-          <a:p>
-            <a:r>
-              <a:rPr lang="en-IN"/>
-              <a:t>[X] Video Demo: 5-minute technical presentation prepared.</a:t>
-            </a:r>
-          </a:p>
-          <a:p>
-            <a:r>
-              <a:rPr lang="en-IN"/>
-              <a:t>[X] Presentation: Finalized 11-slide deck formatted.</a:t>
+            <a:pPr marL="0" indent="0">
+              <a:buNone/>
+            </a:pPr>
+            <a:r>
+              <a:rPr lang="en-IN" dirty="0" smtClean="0"/>
+              <a:t>[ ] </a:t>
+            </a:r>
+            <a:r>
+              <a:rPr lang="en-IN" dirty="0"/>
+              <a:t>Working Prototype Code: Public GitHub repository uploaded.</a:t>
+            </a:r>
+          </a:p>
+          <a:p>
+            <a:pPr marL="0" indent="0">
+              <a:buNone/>
+            </a:pPr>
+            <a:r>
+              <a:rPr lang="en-IN" dirty="0" smtClean="0"/>
+              <a:t>[</a:t>
+            </a:r>
+            <a:r>
+              <a:rPr lang="en-IN" dirty="0"/>
+              <a:t> </a:t>
+            </a:r>
+            <a:r>
+              <a:rPr lang="en-IN" dirty="0" smtClean="0"/>
+              <a:t>] </a:t>
+            </a:r>
+            <a:r>
+              <a:rPr lang="en-IN" dirty="0"/>
+              <a:t>Reproducible Build: </a:t>
+            </a:r>
+            <a:r>
+              <a:rPr lang="en-IN" dirty="0" err="1"/>
+              <a:t>Dockerfile</a:t>
+            </a:r>
+            <a:r>
+              <a:rPr lang="en-IN" dirty="0"/>
+              <a:t> with INSTALL_EMBEDDINGS=true.</a:t>
+            </a:r>
+          </a:p>
+          <a:p>
+            <a:pPr marL="0" indent="0">
+              <a:buNone/>
+            </a:pPr>
+            <a:r>
+              <a:rPr lang="en-IN" dirty="0" smtClean="0"/>
+              <a:t>[ ] </a:t>
+            </a:r>
+            <a:r>
+              <a:rPr lang="en-IN" dirty="0"/>
+              <a:t>Documentation: Full README.md with setup instructions.</a:t>
+            </a:r>
+          </a:p>
+          <a:p>
+            <a:pPr marL="0" indent="0">
+              <a:buNone/>
+            </a:pPr>
+            <a:r>
+              <a:rPr lang="en-IN" dirty="0" smtClean="0"/>
+              <a:t>[ ] </a:t>
+            </a:r>
+            <a:r>
+              <a:rPr lang="en-IN" dirty="0"/>
+              <a:t>Video Demo: 5-minute technical presentation prepared.</a:t>
+            </a:r>
+          </a:p>
+          <a:p>
+            <a:pPr marL="0" indent="0">
+              <a:buNone/>
+            </a:pPr>
+            <a:r>
+              <a:rPr lang="en-IN" dirty="0" smtClean="0"/>
+              <a:t>[ ] </a:t>
+            </a:r>
+            <a:r>
+              <a:rPr lang="en-IN" dirty="0"/>
+              <a:t>Presentation: Finalized 11-slide deck formatted.</a:t>
             </a:r>
           </a:p>
         </p:txBody>
@@ -3902,7 +4194,7 @@
           <p:cNvPr id="2" name="Title 1">
             <a:extLst>
               <a:ext uri="{FF2B5EF4-FFF2-40B4-BE49-F238E27FC236}">
-                <a16:creationId xmlns:a16="http://schemas.microsoft.com/office/drawing/2014/main" id="{FB62EB39-818B-BBBE-7C15-AEC585AF91A1}"/>
+                <a16:creationId xmlns:a16="http://schemas.microsoft.com/office/drawing/2014/main" xmlns="" id="{FB62EB39-818B-BBBE-7C15-AEC585AF91A1}"/>
               </a:ext>
             </a:extLst>
           </p:cNvPr>
@@ -3919,7 +4211,7 @@
           <a:lstStyle/>
           <a:p>
             <a:r>
-              <a:rPr lang="en-IN"/>
+              <a:rPr lang="en-IN" dirty="0"/>
               <a:t>Agenda</a:t>
             </a:r>
           </a:p>
@@ -3930,7 +4222,7 @@
           <p:cNvPr id="3" name="Text Placeholder 2">
             <a:extLst>
               <a:ext uri="{FF2B5EF4-FFF2-40B4-BE49-F238E27FC236}">
-                <a16:creationId xmlns:a16="http://schemas.microsoft.com/office/drawing/2014/main" id="{E5E630C7-D8D5-07B1-DBFE-DC25EF2C4698}"/>
+                <a16:creationId xmlns:a16="http://schemas.microsoft.com/office/drawing/2014/main" xmlns="" id="{E5E630C7-D8D5-07B1-DBFE-DC25EF2C4698}"/>
               </a:ext>
             </a:extLst>
           </p:cNvPr>
@@ -3941,66 +4233,122 @@
             <p:ph type="body" idx="1"/>
           </p:nvPr>
         </p:nvSpPr>
-        <p:spPr/>
+        <p:spPr>
+          <a:xfrm>
+            <a:off x="838200" y="1583140"/>
+            <a:ext cx="10515600" cy="4593823"/>
+          </a:xfrm>
+        </p:spPr>
         <p:txBody>
           <a:bodyPr>
-            <a:normAutofit lnSpcReduction="10000"/>
+            <a:normAutofit/>
           </a:bodyPr>
           <a:lstStyle/>
           <a:p>
-            <a:r>
-              <a:rPr lang="en-US"/>
+            <a:pPr marL="0" indent="0">
+              <a:buNone/>
+            </a:pPr>
+            <a:r>
+              <a:rPr lang="en-US" dirty="0"/>
               <a:t>01. Problem &amp; Existing Solution Gaps</a:t>
             </a:r>
           </a:p>
           <a:p>
-            <a:r>
-              <a:rPr lang="en-US"/>
+            <a:pPr marL="0" indent="0">
+              <a:buNone/>
+            </a:pPr>
+            <a:r>
+              <a:rPr lang="en-US" dirty="0" smtClean="0"/>
               <a:t>02. Solution &amp; Architecture</a:t>
             </a:r>
           </a:p>
           <a:p>
-            <a:r>
-              <a:rPr lang="en-US"/>
-              <a:t>03. Demo &amp; Product Walkthrough</a:t>
-            </a:r>
-          </a:p>
-          <a:p>
-            <a:r>
-              <a:rPr lang="en-US"/>
+            <a:pPr marL="0" indent="0">
+              <a:buNone/>
+            </a:pPr>
+            <a:r>
+              <a:rPr lang="en-US" dirty="0" smtClean="0"/>
+              <a:t>03</a:t>
+            </a:r>
+            <a:r>
+              <a:rPr lang="en-US" dirty="0"/>
+              <a:t>. Demo &amp; Product Walkthrough</a:t>
+            </a:r>
+          </a:p>
+          <a:p>
+            <a:pPr marL="0" indent="0">
+              <a:buNone/>
+            </a:pPr>
+            <a:r>
+              <a:rPr lang="en-US" dirty="0"/>
               <a:t>04. Tools &amp; Tech Stack</a:t>
             </a:r>
           </a:p>
           <a:p>
-            <a:r>
-              <a:rPr lang="en-US"/>
+            <a:pPr marL="0" indent="0">
+              <a:buNone/>
+            </a:pPr>
+            <a:r>
+              <a:rPr lang="en-US" dirty="0"/>
               <a:t>05. Impact &amp; Use Cases</a:t>
             </a:r>
           </a:p>
           <a:p>
-            <a:r>
-              <a:rPr lang="en-US"/>
+            <a:pPr marL="0" indent="0">
+              <a:buNone/>
+            </a:pPr>
+            <a:r>
+              <a:rPr lang="en-US" dirty="0" smtClean="0"/>
               <a:t>06. Innovation &amp; Results</a:t>
             </a:r>
           </a:p>
           <a:p>
-            <a:r>
-              <a:rPr lang="en-US"/>
-              <a:t>07. What's Next</a:t>
-            </a:r>
-          </a:p>
-          <a:p>
-            <a:r>
-              <a:rPr lang="en-US"/>
-              <a:t>08. Differentiation (Brownie Points)</a:t>
-            </a:r>
-          </a:p>
-          <a:p>
-            <a:r>
-              <a:rPr lang="en-US"/>
-              <a:t>09. Submission Checklist</a:t>
-            </a:r>
-            <a:endParaRPr lang="en-IN"/>
+            <a:pPr marL="0" indent="0">
+              <a:buNone/>
+            </a:pPr>
+            <a:r>
+              <a:rPr lang="en-US" dirty="0" smtClean="0"/>
+              <a:t>07</a:t>
+            </a:r>
+            <a:r>
+              <a:rPr lang="en-US" dirty="0"/>
+              <a:t>. What's </a:t>
+            </a:r>
+            <a:r>
+              <a:rPr lang="en-US" dirty="0" smtClean="0"/>
+              <a:t>Next </a:t>
+            </a:r>
+          </a:p>
+          <a:p>
+            <a:pPr marL="0" indent="0">
+              <a:buNone/>
+            </a:pPr>
+            <a:r>
+              <a:rPr lang="en-US" dirty="0" smtClean="0"/>
+              <a:t>08</a:t>
+            </a:r>
+            <a:r>
+              <a:rPr lang="en-US" dirty="0"/>
+              <a:t>. Differentiation (Brownie </a:t>
+            </a:r>
+            <a:r>
+              <a:rPr lang="en-US" dirty="0" smtClean="0"/>
+              <a:t>Points) </a:t>
+            </a:r>
+          </a:p>
+          <a:p>
+            <a:pPr marL="0" indent="0">
+              <a:buNone/>
+            </a:pPr>
+            <a:r>
+              <a:rPr lang="en-US" dirty="0" smtClean="0"/>
+              <a:t>09</a:t>
+            </a:r>
+            <a:r>
+              <a:rPr lang="en-US" dirty="0"/>
+              <a:t>. Submission Checklist</a:t>
+            </a:r>
+            <a:endParaRPr lang="en-IN" dirty="0"/>
           </a:p>
         </p:txBody>
       </p:sp>
@@ -4039,7 +4387,7 @@
           <p:cNvPr id="2" name="Title 1">
             <a:extLst>
               <a:ext uri="{FF2B5EF4-FFF2-40B4-BE49-F238E27FC236}">
-                <a16:creationId xmlns:a16="http://schemas.microsoft.com/office/drawing/2014/main" id="{E55E1119-C2D6-06AC-7719-9C86C9DC40D0}"/>
+                <a16:creationId xmlns:a16="http://schemas.microsoft.com/office/drawing/2014/main" xmlns="" id="{E55E1119-C2D6-06AC-7719-9C86C9DC40D0}"/>
               </a:ext>
             </a:extLst>
           </p:cNvPr>
@@ -4056,7 +4404,7 @@
           <a:lstStyle/>
           <a:p>
             <a:r>
-              <a:rPr lang="en-IN"/>
+              <a:rPr lang="en-IN" dirty="0"/>
               <a:t>Existing Solutions &amp; Technical Gaps</a:t>
             </a:r>
           </a:p>
@@ -4067,7 +4415,7 @@
           <p:cNvPr id="3" name="Text Placeholder 2">
             <a:extLst>
               <a:ext uri="{FF2B5EF4-FFF2-40B4-BE49-F238E27FC236}">
-                <a16:creationId xmlns:a16="http://schemas.microsoft.com/office/drawing/2014/main" id="{7D94ECEB-C931-8E4C-9048-2437F5BAC378}"/>
+                <a16:creationId xmlns:a16="http://schemas.microsoft.com/office/drawing/2014/main" xmlns="" id="{7D94ECEB-C931-8E4C-9048-2437F5BAC378}"/>
               </a:ext>
             </a:extLst>
           </p:cNvPr>
@@ -4081,40 +4429,69 @@
         <p:spPr/>
         <p:txBody>
           <a:bodyPr>
-            <a:normAutofit fontScale="92500" lnSpcReduction="10000"/>
+            <a:normAutofit fontScale="92500"/>
           </a:bodyPr>
           <a:lstStyle/>
           <a:p>
             <a:r>
-              <a:rPr lang="en-IN"/>
+              <a:rPr lang="en-IN" dirty="0"/>
               <a:t>Existing SIIS Context:</a:t>
             </a:r>
           </a:p>
           <a:p>
-            <a:r>
-              <a:rPr lang="en-IN"/>
-              <a:t>- Samsung SIIS contains valuable, verified troubleshooting content for mobile/display devices.</a:t>
-            </a:r>
-          </a:p>
-          <a:p>
-            <a:endParaRPr lang="en-IN"/>
-          </a:p>
-          <a:p>
-            <a:r>
-              <a:rPr lang="en-IN"/>
+            <a:pPr marL="0" indent="0">
+              <a:buNone/>
+            </a:pPr>
+            <a:r>
+              <a:rPr lang="en-IN" dirty="0" smtClean="0"/>
+              <a:t> - Samsung </a:t>
+            </a:r>
+            <a:r>
+              <a:rPr lang="en-IN" dirty="0"/>
+              <a:t>SIIS contains valuable, verified troubleshooting content for mobile/display devices.</a:t>
+            </a:r>
+          </a:p>
+          <a:p>
+            <a:endParaRPr lang="en-IN" dirty="0"/>
+          </a:p>
+          <a:p>
+            <a:r>
+              <a:rPr lang="en-IN" dirty="0"/>
               <a:t>Technical Gaps (Core Issues):</a:t>
             </a:r>
           </a:p>
           <a:p>
-            <a:r>
-              <a:rPr lang="en-IN"/>
-              <a:t>1. Unstructured &amp; Dense Raw HTML Format: SIIS knowledge responses exist as unparsed HTML text, requiring manual parsing and causing UI latency.</a:t>
-            </a:r>
-          </a:p>
-          <a:p>
-            <a:r>
-              <a:rPr lang="en-IN"/>
-              <a:t>2. Lack of Deep Actionable Linking: Search solutions return full articles without isolating individual diagnostic steps or direct Bixby setting deeplinks.</a:t>
+            <a:pPr marL="0" indent="0">
+              <a:buNone/>
+            </a:pPr>
+            <a:r>
+              <a:rPr lang="en-IN" dirty="0" smtClean="0"/>
+              <a:t> 1</a:t>
+            </a:r>
+            <a:r>
+              <a:rPr lang="en-IN" dirty="0"/>
+              <a:t>. Unstructured &amp; Dense Raw HTML Format: SIIS knowledge responses exist as unparsed HTML text, requiring manual parsing and causing UI latency.</a:t>
+            </a:r>
+          </a:p>
+          <a:p>
+            <a:pPr marL="0" indent="0">
+              <a:buNone/>
+            </a:pPr>
+            <a:r>
+              <a:rPr lang="en-IN" dirty="0" smtClean="0"/>
+              <a:t> 2</a:t>
+            </a:r>
+            <a:r>
+              <a:rPr lang="en-IN" dirty="0"/>
+              <a:t>. Lack of Deep Actionable Linking: Search solutions return full articles without isolating individual diagnostic steps or direct Bixby setting </a:t>
+            </a:r>
+            <a:r>
+              <a:rPr lang="en-IN" dirty="0" err="1"/>
+              <a:t>deeplinks</a:t>
+            </a:r>
+            <a:r>
+              <a:rPr lang="en-IN" dirty="0"/>
+              <a:t>.</a:t>
             </a:r>
           </a:p>
         </p:txBody>
@@ -4154,7 +4531,7 @@
           <p:cNvPr id="2" name="Title 1">
             <a:extLst>
               <a:ext uri="{FF2B5EF4-FFF2-40B4-BE49-F238E27FC236}">
-                <a16:creationId xmlns:a16="http://schemas.microsoft.com/office/drawing/2014/main" id="{723DD3A6-43ED-6BDA-95DB-129CFB94D70A}"/>
+                <a16:creationId xmlns:a16="http://schemas.microsoft.com/office/drawing/2014/main" xmlns="" id="{723DD3A6-43ED-6BDA-95DB-129CFB94D70A}"/>
               </a:ext>
             </a:extLst>
           </p:cNvPr>
@@ -4182,7 +4559,7 @@
           <p:cNvPr id="3" name="Text Placeholder 2">
             <a:extLst>
               <a:ext uri="{FF2B5EF4-FFF2-40B4-BE49-F238E27FC236}">
-                <a16:creationId xmlns:a16="http://schemas.microsoft.com/office/drawing/2014/main" id="{48D46C40-5D72-B5E4-899C-28E79730DD42}"/>
+                <a16:creationId xmlns:a16="http://schemas.microsoft.com/office/drawing/2014/main" xmlns="" id="{48D46C40-5D72-B5E4-899C-28E79730DD42}"/>
               </a:ext>
             </a:extLst>
           </p:cNvPr>
@@ -4201,59 +4578,136 @@
           <a:lstStyle/>
           <a:p>
             <a:r>
-              <a:rPr lang="en-IN"/>
+              <a:rPr lang="en-IN" dirty="0"/>
               <a:t>Solution Overview:</a:t>
             </a:r>
           </a:p>
           <a:p>
-            <a:r>
-              <a:rPr lang="en-IN"/>
-              <a:t>- High-performance FastAPI REST API parsing SIIS HTML into Goal/Action/StepGroup schemas and mapping queries to Bixby deeplinks.</a:t>
-            </a:r>
-          </a:p>
-          <a:p>
-            <a:endParaRPr lang="en-IN"/>
-          </a:p>
-          <a:p>
-            <a:r>
-              <a:rPr lang="en-IN"/>
+            <a:pPr marL="0" indent="0">
+              <a:buNone/>
+            </a:pPr>
+            <a:r>
+              <a:rPr lang="en-IN" dirty="0"/>
+              <a:t>- High-performance </a:t>
+            </a:r>
+            <a:r>
+              <a:rPr lang="en-IN" dirty="0" err="1"/>
+              <a:t>FastAPI</a:t>
+            </a:r>
+            <a:r>
+              <a:rPr lang="en-IN" dirty="0"/>
+              <a:t> REST API parsing SIIS HTML into Goal/Action/</a:t>
+            </a:r>
+            <a:r>
+              <a:rPr lang="en-IN" dirty="0" err="1"/>
+              <a:t>StepGroup</a:t>
+            </a:r>
+            <a:r>
+              <a:rPr lang="en-IN" dirty="0"/>
+              <a:t> schemas and mapping queries to Bixby </a:t>
+            </a:r>
+            <a:r>
+              <a:rPr lang="en-IN" dirty="0" err="1"/>
+              <a:t>deeplinks</a:t>
+            </a:r>
+            <a:r>
+              <a:rPr lang="en-IN" dirty="0"/>
+              <a:t>.</a:t>
+            </a:r>
+          </a:p>
+          <a:p>
+            <a:endParaRPr lang="en-IN" dirty="0"/>
+          </a:p>
+          <a:p>
+            <a:r>
+              <a:rPr lang="en-IN" dirty="0"/>
               <a:t>Architecture Flow:</a:t>
             </a:r>
           </a:p>
           <a:p>
-            <a:r>
-              <a:rPr lang="en-IN"/>
+            <a:pPr marL="0" indent="0">
+              <a:buNone/>
+            </a:pPr>
+            <a:r>
+              <a:rPr lang="en-IN" dirty="0"/>
               <a:t>- Input Layer: User query &amp; device context via JSON.</a:t>
             </a:r>
           </a:p>
           <a:p>
-            <a:r>
-              <a:rPr lang="en-IN"/>
+            <a:pPr marL="0" indent="0">
+              <a:buNone/>
+            </a:pPr>
+            <a:r>
+              <a:rPr lang="en-IN" dirty="0"/>
               <a:t>- Hybrid 3-Tier Matching Engine:</a:t>
             </a:r>
           </a:p>
           <a:p>
-            <a:r>
-              <a:rPr lang="en-IN"/>
+            <a:pPr marL="0" indent="0">
+              <a:buNone/>
+            </a:pPr>
+            <a:r>
+              <a:rPr lang="en-IN" dirty="0"/>
               <a:t>  * Tier 1: Exact Match (Hash/Exact phrase)</a:t>
             </a:r>
           </a:p>
           <a:p>
-            <a:r>
-              <a:rPr lang="en-IN"/>
-              <a:t>  * Tier 2: Semantic Match (all-MiniLM-L6-v2 vector embeddings)</a:t>
-            </a:r>
-          </a:p>
-          <a:p>
-            <a:r>
-              <a:rPr lang="en-IN"/>
-              <a:t>  * Tier 3: Lexical Match (TF-IDF &amp; difflib fallback)</a:t>
-            </a:r>
-          </a:p>
-          <a:p>
-            <a:r>
-              <a:rPr lang="en-IN"/>
-              <a:t>- Caching Layer: diskcache indexing for instant retrieval.</a:t>
+            <a:pPr marL="0" indent="0">
+              <a:buNone/>
+            </a:pPr>
+            <a:r>
+              <a:rPr lang="en-IN" dirty="0"/>
+              <a:t>  * Tier 2: Semantic Match (all-MiniLM-L6-v2 vector </a:t>
+            </a:r>
+            <a:r>
+              <a:rPr lang="en-IN" dirty="0" err="1"/>
+              <a:t>embeddings</a:t>
+            </a:r>
+            <a:r>
+              <a:rPr lang="en-IN" dirty="0"/>
+              <a:t>)</a:t>
+            </a:r>
+          </a:p>
+          <a:p>
+            <a:pPr marL="0" indent="0">
+              <a:buNone/>
+            </a:pPr>
+            <a:r>
+              <a:rPr lang="en-IN" dirty="0"/>
+              <a:t>  * Tier 3: Lexical Match (TF-IDF &amp; </a:t>
+            </a:r>
+            <a:r>
+              <a:rPr lang="en-IN" dirty="0" err="1"/>
+              <a:t>difflib</a:t>
+            </a:r>
+            <a:r>
+              <a:rPr lang="en-IN" dirty="0"/>
+              <a:t> </a:t>
+            </a:r>
+            <a:r>
+              <a:rPr lang="en-IN" dirty="0" err="1"/>
+              <a:t>fallback</a:t>
+            </a:r>
+            <a:r>
+              <a:rPr lang="en-IN" dirty="0"/>
+              <a:t>)</a:t>
+            </a:r>
+          </a:p>
+          <a:p>
+            <a:pPr marL="0" indent="0">
+              <a:buNone/>
+            </a:pPr>
+            <a:r>
+              <a:rPr lang="en-IN" dirty="0"/>
+              <a:t>- Caching Layer: </a:t>
+            </a:r>
+            <a:r>
+              <a:rPr lang="en-IN" dirty="0" err="1"/>
+              <a:t>diskcache</a:t>
+            </a:r>
+            <a:r>
+              <a:rPr lang="en-IN" dirty="0"/>
+              <a:t> indexing for instant retrieval.</a:t>
             </a:r>
           </a:p>
         </p:txBody>
@@ -4290,13 +4744,7 @@
       </p:grpSpPr>
       <p:sp>
         <p:nvSpPr>
-          <p:cNvPr id="2" name="Title 1">
-            <a:extLst>
-              <a:ext uri="{FF2B5EF4-FFF2-40B4-BE49-F238E27FC236}">
-                <a16:creationId xmlns:a16="http://schemas.microsoft.com/office/drawing/2014/main" id="{78F9D6C7-8DAA-27A6-2246-152EDAC98310}"/>
-              </a:ext>
-            </a:extLst>
-          </p:cNvPr>
+          <p:cNvPr id="2" name="Title 1"/>
           <p:cNvSpPr>
             <a:spLocks noGrp="1"/>
           </p:cNvSpPr>
@@ -4309,22 +4757,13 @@
           <a:bodyPr/>
           <a:lstStyle/>
           <a:p>
-            <a:r>
-              <a:rPr lang="en-IN"/>
-              <a:t>Demo &amp; Product Walkthrough</a:t>
-            </a:r>
-          </a:p>
-        </p:txBody>
-      </p:sp>
-      <p:sp>
-        <p:nvSpPr>
-          <p:cNvPr id="3" name="Text Placeholder 2">
-            <a:extLst>
-              <a:ext uri="{FF2B5EF4-FFF2-40B4-BE49-F238E27FC236}">
-                <a16:creationId xmlns:a16="http://schemas.microsoft.com/office/drawing/2014/main" id="{F1ECEC60-1F39-BF9E-4F5B-35B1011147AE}"/>
-              </a:ext>
-            </a:extLst>
-          </p:cNvPr>
+            <a:endParaRPr lang="en-IN"/>
+          </a:p>
+        </p:txBody>
+      </p:sp>
+      <p:sp>
+        <p:nvSpPr>
+          <p:cNvPr id="3" name="Text Placeholder 2"/>
           <p:cNvSpPr>
             <a:spLocks noGrp="1"/>
           </p:cNvSpPr>
@@ -4337,35 +4776,44 @@
           <a:bodyPr/>
           <a:lstStyle/>
           <a:p>
-            <a:r>
-              <a:rPr lang="en-IN"/>
-              <a:t>- GET /health: Healthcheck validation for server liveness.</a:t>
-            </a:r>
-          </a:p>
-          <a:p>
-            <a:r>
-              <a:rPr lang="en-IN"/>
-              <a:t>- POST /v1/troubleshoot: Receives query (e.g., 'My screen won't rotate').</a:t>
-            </a:r>
-          </a:p>
-          <a:p>
-            <a:r>
-              <a:rPr lang="en-IN"/>
-              <a:t>- Interactive Execution: Evaluators hit API via Swagger UI (/docs) or curl.</a:t>
-            </a:r>
-          </a:p>
-          <a:p>
-            <a:r>
-              <a:rPr lang="en-IN"/>
-              <a:t>- Structured JSON Output: Returns parsed step groups, direct bixby:// deeplinks, and latency metrics.</a:t>
-            </a:r>
-          </a:p>
-        </p:txBody>
-      </p:sp>
+            <a:endParaRPr lang="en-IN" dirty="0"/>
+          </a:p>
+        </p:txBody>
+      </p:sp>
+      <p:pic>
+        <p:nvPicPr>
+          <p:cNvPr id="5" name="Picture 4"/>
+          <p:cNvPicPr>
+            <a:picLocks noChangeAspect="1"/>
+          </p:cNvPicPr>
+          <p:nvPr/>
+        </p:nvPicPr>
+        <p:blipFill>
+          <a:blip r:embed="rId2">
+            <a:extLst>
+              <a:ext uri="{28A0092B-C50C-407E-A947-70E740481C1C}">
+                <a14:useLocalDpi xmlns:a14="http://schemas.microsoft.com/office/drawing/2010/main" val="0"/>
+              </a:ext>
+            </a:extLst>
+          </a:blip>
+          <a:stretch>
+            <a:fillRect/>
+          </a:stretch>
+        </p:blipFill>
+        <p:spPr>
+          <a:xfrm>
+            <a:off x="709685" y="259307"/>
+            <a:ext cx="10754434" cy="6032311"/>
+          </a:xfrm>
+          <a:prstGeom prst="rect">
+            <a:avLst/>
+          </a:prstGeom>
+        </p:spPr>
+      </p:pic>
     </p:spTree>
     <p:extLst>
       <p:ext uri="{BB962C8B-B14F-4D97-AF65-F5344CB8AC3E}">
-        <p14:creationId xmlns:p14="http://schemas.microsoft.com/office/powerpoint/2010/main" val="280057129"/>
+        <p14:creationId xmlns:p14="http://schemas.microsoft.com/office/powerpoint/2010/main" val="651961474"/>
       </p:ext>
     </p:extLst>
   </p:cSld>
@@ -4397,7 +4845,7 @@
           <p:cNvPr id="2" name="Title 1">
             <a:extLst>
               <a:ext uri="{FF2B5EF4-FFF2-40B4-BE49-F238E27FC236}">
-                <a16:creationId xmlns:a16="http://schemas.microsoft.com/office/drawing/2014/main" id="{60CD8078-B3E3-530F-BECB-709CC65A514E}"/>
+                <a16:creationId xmlns:a16="http://schemas.microsoft.com/office/drawing/2014/main" xmlns="" id="{78F9D6C7-8DAA-27A6-2246-152EDAC98310}"/>
               </a:ext>
             </a:extLst>
           </p:cNvPr>
@@ -4414,8 +4862,8 @@
           <a:lstStyle/>
           <a:p>
             <a:r>
-              <a:rPr lang="en-IN"/>
-              <a:t>Tools &amp; Tech Stack</a:t>
+              <a:rPr lang="en-IN" dirty="0"/>
+              <a:t>Demo &amp; Product Walkthrough</a:t>
             </a:r>
           </a:p>
         </p:txBody>
@@ -4425,7 +4873,7 @@
           <p:cNvPr id="3" name="Text Placeholder 2">
             <a:extLst>
               <a:ext uri="{FF2B5EF4-FFF2-40B4-BE49-F238E27FC236}">
-                <a16:creationId xmlns:a16="http://schemas.microsoft.com/office/drawing/2014/main" id="{4BFB9CBC-E276-BEFE-F0E5-6C4A0E3BF8E7}"/>
+                <a16:creationId xmlns:a16="http://schemas.microsoft.com/office/drawing/2014/main" xmlns="" id="{F1ECEC60-1F39-BF9E-4F5B-35B1011147AE}"/>
               </a:ext>
             </a:extLst>
           </p:cNvPr>
@@ -4442,32 +4890,58 @@
           <a:lstStyle/>
           <a:p>
             <a:r>
-              <a:rPr lang="en-IN"/>
-              <a:t>- Backend: Python 3.12, FastAPI, Uvicorn</a:t>
-            </a:r>
-          </a:p>
-          <a:p>
-            <a:r>
-              <a:rPr lang="en-IN"/>
-              <a:t>- NLP &amp; Machine Learning: PyTorch, Sentence-Transformers (all-MiniLM-L6-v2)</a:t>
-            </a:r>
-          </a:p>
-          <a:p>
-            <a:r>
-              <a:rPr lang="en-IN"/>
-              <a:t>- Fallback Search &amp; Parsing: scikit-learn (TF-IDF), BeautifulSoup4, Regex</a:t>
-            </a:r>
-          </a:p>
-          <a:p>
-            <a:r>
-              <a:rPr lang="en-IN"/>
-              <a:t>- Caching &amp; Performance: diskcache</a:t>
-            </a:r>
-          </a:p>
-          <a:p>
-            <a:r>
-              <a:rPr lang="en-IN"/>
-              <a:t>- DevOps &amp; Deployment: Docker (baked embeddings), Git, GitHub</a:t>
+              <a:rPr lang="en-IN" dirty="0" smtClean="0"/>
+              <a:t>GET </a:t>
+            </a:r>
+            <a:r>
+              <a:rPr lang="en-IN" dirty="0"/>
+              <a:t>/health: </a:t>
+            </a:r>
+            <a:r>
+              <a:rPr lang="en-IN" dirty="0" err="1"/>
+              <a:t>Healthcheck</a:t>
+            </a:r>
+            <a:r>
+              <a:rPr lang="en-IN" dirty="0"/>
+              <a:t> validation for server liveness.</a:t>
+            </a:r>
+          </a:p>
+          <a:p>
+            <a:r>
+              <a:rPr lang="en-IN" dirty="0" smtClean="0"/>
+              <a:t>POST </a:t>
+            </a:r>
+            <a:r>
+              <a:rPr lang="en-IN" dirty="0"/>
+              <a:t>/v1/troubleshoot: Receives query (e.g., 'My screen won't rotate').</a:t>
+            </a:r>
+          </a:p>
+          <a:p>
+            <a:r>
+              <a:rPr lang="en-IN" dirty="0" smtClean="0"/>
+              <a:t>Interactive </a:t>
+            </a:r>
+            <a:r>
+              <a:rPr lang="en-IN" dirty="0"/>
+              <a:t>Execution: Evaluators hit API via Swagger UI (/docs) or curl.</a:t>
+            </a:r>
+          </a:p>
+          <a:p>
+            <a:r>
+              <a:rPr lang="en-IN" dirty="0" smtClean="0"/>
+              <a:t>Structured </a:t>
+            </a:r>
+            <a:r>
+              <a:rPr lang="en-IN" dirty="0"/>
+              <a:t>JSON Output: Returns parsed step groups, direct bixby:// </a:t>
+            </a:r>
+            <a:r>
+              <a:rPr lang="en-IN" dirty="0" err="1"/>
+              <a:t>deeplinks</a:t>
+            </a:r>
+            <a:r>
+              <a:rPr lang="en-IN" dirty="0"/>
+              <a:t>, and latency metrics.</a:t>
             </a:r>
           </a:p>
         </p:txBody>
@@ -4475,7 +4949,7 @@
     </p:spTree>
     <p:extLst>
       <p:ext uri="{BB962C8B-B14F-4D97-AF65-F5344CB8AC3E}">
-        <p14:creationId xmlns:p14="http://schemas.microsoft.com/office/powerpoint/2010/main" val="2303867331"/>
+        <p14:creationId xmlns:p14="http://schemas.microsoft.com/office/powerpoint/2010/main" val="280057129"/>
       </p:ext>
     </p:extLst>
   </p:cSld>
@@ -4507,7 +4981,7 @@
           <p:cNvPr id="2" name="Title 1">
             <a:extLst>
               <a:ext uri="{FF2B5EF4-FFF2-40B4-BE49-F238E27FC236}">
-                <a16:creationId xmlns:a16="http://schemas.microsoft.com/office/drawing/2014/main" id="{5649F91F-E019-DAD0-1CAA-4FF5DF6A3FC5}"/>
+                <a16:creationId xmlns:a16="http://schemas.microsoft.com/office/drawing/2014/main" xmlns="" id="{60CD8078-B3E3-530F-BECB-709CC65A514E}"/>
               </a:ext>
             </a:extLst>
           </p:cNvPr>
@@ -4525,7 +4999,7 @@
           <a:p>
             <a:r>
               <a:rPr lang="en-IN"/>
-              <a:t>Impact &amp; Use Cases</a:t>
+              <a:t>Tools &amp; Tech Stack</a:t>
             </a:r>
           </a:p>
         </p:txBody>
@@ -4535,7 +5009,7 @@
           <p:cNvPr id="3" name="Text Placeholder 2">
             <a:extLst>
               <a:ext uri="{FF2B5EF4-FFF2-40B4-BE49-F238E27FC236}">
-                <a16:creationId xmlns:a16="http://schemas.microsoft.com/office/drawing/2014/main" id="{272387FB-45A7-570D-E1A5-CE2969C8453C}"/>
+                <a16:creationId xmlns:a16="http://schemas.microsoft.com/office/drawing/2014/main" xmlns="" id="{4BFB9CBC-E276-BEFE-F0E5-6C4A0E3BF8E7}"/>
               </a:ext>
             </a:extLst>
           </p:cNvPr>
@@ -4552,26 +5026,98 @@
           <a:lstStyle/>
           <a:p>
             <a:r>
-              <a:rPr lang="en-IN"/>
-              <a:t>- Sub-Millisecond Speed: Latency reduced from 220ms (cold) to 0.48ms on cached runs.</a:t>
-            </a:r>
-          </a:p>
-          <a:p>
-            <a:r>
-              <a:rPr lang="en-IN"/>
-              <a:t>- Reduced Support Tickets: Resolves repetitive issues via automated step guidance.</a:t>
-            </a:r>
-          </a:p>
-          <a:p>
-            <a:r>
-              <a:rPr lang="en-IN"/>
-              <a:t>- Direct Execution: One-click bixby:// links replace manual menu navigation.</a:t>
-            </a:r>
-          </a:p>
-          <a:p>
-            <a:r>
-              <a:rPr lang="en-IN"/>
-              <a:t>- Zero Hallucinations: Grounded strictly in verified Samsung SIIS content.</a:t>
+              <a:rPr lang="en-IN" dirty="0" smtClean="0"/>
+              <a:t>Backend</a:t>
+            </a:r>
+            <a:r>
+              <a:rPr lang="en-IN" dirty="0"/>
+              <a:t>: Python 3.12, </a:t>
+            </a:r>
+            <a:r>
+              <a:rPr lang="en-IN" dirty="0" err="1"/>
+              <a:t>FastAPI</a:t>
+            </a:r>
+            <a:r>
+              <a:rPr lang="en-IN" dirty="0"/>
+              <a:t>, </a:t>
+            </a:r>
+            <a:r>
+              <a:rPr lang="en-IN" dirty="0" err="1"/>
+              <a:t>Uvicorn</a:t>
+            </a:r>
+            <a:endParaRPr lang="en-IN" dirty="0"/>
+          </a:p>
+          <a:p>
+            <a:r>
+              <a:rPr lang="en-IN" dirty="0" smtClean="0"/>
+              <a:t>NLP </a:t>
+            </a:r>
+            <a:r>
+              <a:rPr lang="en-IN" dirty="0"/>
+              <a:t>&amp; Machine Learning: </a:t>
+            </a:r>
+            <a:r>
+              <a:rPr lang="en-IN" dirty="0" err="1"/>
+              <a:t>PyTorch</a:t>
+            </a:r>
+            <a:r>
+              <a:rPr lang="en-IN" dirty="0"/>
+              <a:t>, Sentence-Transformers (all-MiniLM-L6-v2)</a:t>
+            </a:r>
+          </a:p>
+          <a:p>
+            <a:r>
+              <a:rPr lang="en-IN" dirty="0" err="1" smtClean="0"/>
+              <a:t>Fallback</a:t>
+            </a:r>
+            <a:r>
+              <a:rPr lang="en-IN" dirty="0" smtClean="0"/>
+              <a:t> </a:t>
+            </a:r>
+            <a:r>
+              <a:rPr lang="en-IN" dirty="0"/>
+              <a:t>Search &amp; Parsing: </a:t>
+            </a:r>
+            <a:r>
+              <a:rPr lang="en-IN" dirty="0" err="1"/>
+              <a:t>scikit</a:t>
+            </a:r>
+            <a:r>
+              <a:rPr lang="en-IN" dirty="0"/>
+              <a:t>-learn (TF-IDF), BeautifulSoup4, Regex</a:t>
+            </a:r>
+          </a:p>
+          <a:p>
+            <a:r>
+              <a:rPr lang="en-IN" dirty="0" smtClean="0"/>
+              <a:t>Caching </a:t>
+            </a:r>
+            <a:r>
+              <a:rPr lang="en-IN" dirty="0"/>
+              <a:t>&amp; Performance: </a:t>
+            </a:r>
+            <a:r>
+              <a:rPr lang="en-IN" dirty="0" err="1"/>
+              <a:t>diskcache</a:t>
+            </a:r>
+            <a:endParaRPr lang="en-IN" dirty="0"/>
+          </a:p>
+          <a:p>
+            <a:r>
+              <a:rPr lang="en-IN" dirty="0" smtClean="0"/>
+              <a:t>DevOps </a:t>
+            </a:r>
+            <a:r>
+              <a:rPr lang="en-IN" dirty="0"/>
+              <a:t>&amp; Deployment: Docker (baked </a:t>
+            </a:r>
+            <a:r>
+              <a:rPr lang="en-IN" dirty="0" err="1"/>
+              <a:t>embeddings</a:t>
+            </a:r>
+            <a:r>
+              <a:rPr lang="en-IN" dirty="0"/>
+              <a:t>), Git, GitHub</a:t>
             </a:r>
           </a:p>
         </p:txBody>
@@ -4579,7 +5125,7 @@
     </p:spTree>
     <p:extLst>
       <p:ext uri="{BB962C8B-B14F-4D97-AF65-F5344CB8AC3E}">
-        <p14:creationId xmlns:p14="http://schemas.microsoft.com/office/powerpoint/2010/main" val="1238261340"/>
+        <p14:creationId xmlns:p14="http://schemas.microsoft.com/office/powerpoint/2010/main" val="2303867331"/>
       </p:ext>
     </p:extLst>
   </p:cSld>
@@ -4611,7 +5157,7 @@
           <p:cNvPr id="2" name="Title 1">
             <a:extLst>
               <a:ext uri="{FF2B5EF4-FFF2-40B4-BE49-F238E27FC236}">
-                <a16:creationId xmlns:a16="http://schemas.microsoft.com/office/drawing/2014/main" id="{6D459AD6-277F-7DA3-0C1D-5F268F28D7A9}"/>
+                <a16:creationId xmlns:a16="http://schemas.microsoft.com/office/drawing/2014/main" xmlns="" id="{5649F91F-E019-DAD0-1CAA-4FF5DF6A3FC5}"/>
               </a:ext>
             </a:extLst>
           </p:cNvPr>
@@ -4629,7 +5175,7 @@
           <a:p>
             <a:r>
               <a:rPr lang="en-IN"/>
-              <a:t>Innovation, Results &amp; Limitations</a:t>
+              <a:t>Impact &amp; Use Cases</a:t>
             </a:r>
           </a:p>
         </p:txBody>
@@ -4639,7 +5185,7 @@
           <p:cNvPr id="3" name="Text Placeholder 2">
             <a:extLst>
               <a:ext uri="{FF2B5EF4-FFF2-40B4-BE49-F238E27FC236}">
-                <a16:creationId xmlns:a16="http://schemas.microsoft.com/office/drawing/2014/main" id="{7C0C8CE1-BE0E-EF07-D3D3-C6C8D5BDA6C9}"/>
+                <a16:creationId xmlns:a16="http://schemas.microsoft.com/office/drawing/2014/main" xmlns="" id="{272387FB-45A7-570D-E1A5-CE2969C8453C}"/>
               </a:ext>
             </a:extLst>
           </p:cNvPr>
@@ -4652,56 +5198,46 @@
         </p:nvSpPr>
         <p:spPr/>
         <p:txBody>
-          <a:bodyPr>
-            <a:normAutofit fontScale="92500" lnSpcReduction="10000"/>
-          </a:bodyPr>
-          <a:lstStyle/>
-          <a:p>
-            <a:r>
-              <a:rPr lang="en-IN"/>
-              <a:t>Innovation Highlights:</a:t>
-            </a:r>
-          </a:p>
-          <a:p>
-            <a:r>
-              <a:rPr lang="en-IN"/>
-              <a:t>- Pre-warmed model weights baked into Docker build.</a:t>
-            </a:r>
-          </a:p>
-          <a:p>
-            <a:r>
-              <a:rPr lang="en-IN"/>
-              <a:t>- 3-tier fallback safety net for offline durability.</a:t>
-            </a:r>
-          </a:p>
-          <a:p>
-            <a:endParaRPr lang="en-IN"/>
-          </a:p>
-          <a:p>
-            <a:r>
-              <a:rPr lang="en-IN"/>
-              <a:t>Observed Results:</a:t>
-            </a:r>
-          </a:p>
-          <a:p>
-            <a:r>
-              <a:rPr lang="en-IN"/>
-              <a:t>- 0.48ms cached latency &amp; 100% schema compliance.</a:t>
-            </a:r>
-          </a:p>
-          <a:p>
-            <a:endParaRPr lang="en-IN"/>
-          </a:p>
-          <a:p>
-            <a:r>
-              <a:rPr lang="en-IN"/>
-              <a:t>Limitations:</a:t>
-            </a:r>
-          </a:p>
-          <a:p>
-            <a:r>
-              <a:rPr lang="en-IN"/>
-              <a:t>- Currently focused on device/display settings; requires expanded rule sets for hardware diagnostics.</a:t>
+          <a:bodyPr/>
+          <a:lstStyle/>
+          <a:p>
+            <a:r>
+              <a:rPr lang="en-IN" dirty="0" smtClean="0"/>
+              <a:t>Sub-Millisecond </a:t>
+            </a:r>
+            <a:r>
+              <a:rPr lang="en-IN" dirty="0"/>
+              <a:t>Speed: Latency reduced from 220ms (cold) to 0.48ms on cached runs.</a:t>
+            </a:r>
+          </a:p>
+          <a:p>
+            <a:r>
+              <a:rPr lang="en-IN" dirty="0" smtClean="0"/>
+              <a:t>Reduced </a:t>
+            </a:r>
+            <a:r>
+              <a:rPr lang="en-IN" dirty="0"/>
+              <a:t>Support Tickets: Resolves repetitive issues via automated step guidance.</a:t>
+            </a:r>
+          </a:p>
+          <a:p>
+            <a:r>
+              <a:rPr lang="en-IN" dirty="0" smtClean="0"/>
+              <a:t>Direct </a:t>
+            </a:r>
+            <a:r>
+              <a:rPr lang="en-IN" dirty="0"/>
+              <a:t>Execution: One-click bixby:// links replace manual menu navigation.</a:t>
+            </a:r>
+          </a:p>
+          <a:p>
+            <a:r>
+              <a:rPr lang="en-IN" dirty="0" smtClean="0"/>
+              <a:t>Zero </a:t>
+            </a:r>
+            <a:r>
+              <a:rPr lang="en-IN" dirty="0"/>
+              <a:t>Hallucinations: Grounded strictly in verified Samsung SIIS content.</a:t>
             </a:r>
           </a:p>
         </p:txBody>
@@ -4709,7 +5245,7 @@
     </p:spTree>
     <p:extLst>
       <p:ext uri="{BB962C8B-B14F-4D97-AF65-F5344CB8AC3E}">
-        <p14:creationId xmlns:p14="http://schemas.microsoft.com/office/powerpoint/2010/main" val="4110733252"/>
+        <p14:creationId xmlns:p14="http://schemas.microsoft.com/office/powerpoint/2010/main" val="1238261340"/>
       </p:ext>
     </p:extLst>
   </p:cSld>
@@ -4741,7 +5277,7 @@
           <p:cNvPr id="2" name="Title 1">
             <a:extLst>
               <a:ext uri="{FF2B5EF4-FFF2-40B4-BE49-F238E27FC236}">
-                <a16:creationId xmlns:a16="http://schemas.microsoft.com/office/drawing/2014/main" id="{75CD6C45-5792-D034-BFD8-89D0D0A4F6BD}"/>
+                <a16:creationId xmlns:a16="http://schemas.microsoft.com/office/drawing/2014/main" xmlns="" id="{6D459AD6-277F-7DA3-0C1D-5F268F28D7A9}"/>
               </a:ext>
             </a:extLst>
           </p:cNvPr>
@@ -4759,7 +5295,7 @@
           <a:p>
             <a:r>
               <a:rPr lang="en-IN"/>
-              <a:t>What's Next</a:t>
+              <a:t>Innovation, Results &amp; Limitations</a:t>
             </a:r>
           </a:p>
         </p:txBody>
@@ -4769,7 +5305,7 @@
           <p:cNvPr id="3" name="Text Placeholder 2">
             <a:extLst>
               <a:ext uri="{FF2B5EF4-FFF2-40B4-BE49-F238E27FC236}">
-                <a16:creationId xmlns:a16="http://schemas.microsoft.com/office/drawing/2014/main" id="{4DC70A2A-49A1-8CC8-0CB4-F604D57191BE}"/>
+                <a16:creationId xmlns:a16="http://schemas.microsoft.com/office/drawing/2014/main" xmlns="" id="{7C0C8CE1-BE0E-EF07-D3D3-C6C8D5BDA6C9}"/>
               </a:ext>
             </a:extLst>
           </p:cNvPr>
@@ -4782,30 +5318,100 @@
         </p:nvSpPr>
         <p:spPr/>
         <p:txBody>
-          <a:bodyPr/>
-          <a:lstStyle/>
-          <a:p>
-            <a:r>
-              <a:rPr lang="en-IN"/>
-              <a:t>- Multi-Device IoT Expansion: Integrate SmartThings and wearables content.</a:t>
-            </a:r>
-          </a:p>
-          <a:p>
-            <a:r>
-              <a:rPr lang="en-IN"/>
-              <a:t>- Edge Quantization: Convert embeddings model to ONNX/CoreML for on-device mobile inference.</a:t>
-            </a:r>
-          </a:p>
-          <a:p>
-            <a:r>
-              <a:rPr lang="en-IN"/>
-              <a:t>- Multilingual Support: Add local language translations for global Bixby actions.</a:t>
-            </a:r>
-          </a:p>
-          <a:p>
-            <a:r>
-              <a:rPr lang="en-IN"/>
-              <a:t>- Enterprise CI/CD Pipeline: Automated sync with SIIS content updates.</a:t>
+          <a:bodyPr>
+            <a:normAutofit fontScale="92500" lnSpcReduction="10000"/>
+          </a:bodyPr>
+          <a:lstStyle/>
+          <a:p>
+            <a:r>
+              <a:rPr lang="en-IN" dirty="0"/>
+              <a:t>Innovation Highlights:</a:t>
+            </a:r>
+          </a:p>
+          <a:p>
+            <a:pPr marL="0" indent="0">
+              <a:buNone/>
+            </a:pPr>
+            <a:r>
+              <a:rPr lang="en-IN" dirty="0" smtClean="0"/>
+              <a:t> - </a:t>
+            </a:r>
+            <a:r>
+              <a:rPr lang="en-IN" dirty="0"/>
+              <a:t>Pre-warmed model weights baked into Docker build.</a:t>
+            </a:r>
+          </a:p>
+          <a:p>
+            <a:pPr marL="0" indent="0">
+              <a:buNone/>
+            </a:pPr>
+            <a:r>
+              <a:rPr lang="en-IN" dirty="0" smtClean="0"/>
+              <a:t> - </a:t>
+            </a:r>
+            <a:r>
+              <a:rPr lang="en-IN" dirty="0"/>
+              <a:t>3-tier </a:t>
+            </a:r>
+            <a:r>
+              <a:rPr lang="en-IN" dirty="0" err="1"/>
+              <a:t>fallback</a:t>
+            </a:r>
+            <a:r>
+              <a:rPr lang="en-IN" dirty="0"/>
+              <a:t> safety net for offline durability.</a:t>
+            </a:r>
+          </a:p>
+          <a:p>
+            <a:endParaRPr lang="en-IN" dirty="0"/>
+          </a:p>
+          <a:p>
+            <a:r>
+              <a:rPr lang="en-IN" dirty="0"/>
+              <a:t>Observed Results:</a:t>
+            </a:r>
+          </a:p>
+          <a:p>
+            <a:pPr marL="0" indent="0">
+              <a:buNone/>
+            </a:pPr>
+            <a:r>
+              <a:rPr lang="en-IN" dirty="0" smtClean="0"/>
+              <a:t> - </a:t>
+            </a:r>
+            <a:r>
+              <a:rPr lang="en-IN" dirty="0"/>
+              <a:t>0.48ms cached latency &amp; 100% schema compliance.</a:t>
+            </a:r>
+          </a:p>
+          <a:p>
+            <a:endParaRPr lang="en-IN" dirty="0"/>
+          </a:p>
+          <a:p>
+            <a:r>
+              <a:rPr lang="en-IN" dirty="0"/>
+              <a:t>Limitations:</a:t>
+            </a:r>
+          </a:p>
+          <a:p>
+            <a:pPr marL="0" indent="0">
+              <a:buNone/>
+            </a:pPr>
+            <a:r>
+              <a:rPr lang="en-IN" dirty="0" smtClean="0"/>
+              <a:t> - </a:t>
+            </a:r>
+            <a:r>
+              <a:rPr lang="en-IN" dirty="0"/>
+              <a:t>Currently focused on device/display settings; requires expanded rule sets </a:t>
+            </a:r>
+            <a:r>
+              <a:rPr lang="en-IN" dirty="0" smtClean="0"/>
+              <a:t>  for </a:t>
+            </a:r>
+            <a:r>
+              <a:rPr lang="en-IN" dirty="0"/>
+              <a:t>hardware diagnostics.</a:t>
             </a:r>
           </a:p>
         </p:txBody>
@@ -4813,7 +5419,7 @@
     </p:spTree>
     <p:extLst>
       <p:ext uri="{BB962C8B-B14F-4D97-AF65-F5344CB8AC3E}">
-        <p14:creationId xmlns:p14="http://schemas.microsoft.com/office/powerpoint/2010/main" val="606432213"/>
+        <p14:creationId xmlns:p14="http://schemas.microsoft.com/office/powerpoint/2010/main" val="4110733252"/>
       </p:ext>
     </p:extLst>
   </p:cSld>
